--- a/運用/スライド/説明会_20260916.pptx
+++ b/運用/スライド/説明会_20260916.pptx
@@ -8393,7 +8393,7 @@
           </p:nvPr>
         </p:nvGraphicFramePr>
         <p:xfrm>
-          <a:off x="566928" y="1280160"/>
+          <a:off x="566928" y="1188720"/>
           <a:ext cx="8010144" cy="914400"/>
         </p:xfrm>
         <a:graphic>
@@ -8405,7 +8405,7 @@
                 <a:gridCol w="2651760"/>
                 <a:gridCol w="3255264"/>
               </a:tblGrid>
-              <a:tr h="384048">
+              <a:tr h="347472">
                 <a:tc>
                   <a:txBody>
                     <a:bodyPr/>
@@ -8414,14 +8414,14 @@
                       <a:pPr indent="0" marL="0">
                         <a:buNone/>
                       </a:pPr>
-                      <a:endParaRPr lang="en-US" sz="1200" dirty="0">
+                      <a:endParaRPr lang="en-US" sz="1150" dirty="0">
                         <a:latin typeface="Yu Gothic" charset="0"/>
                         <a:ea typeface="Yu Gothic" charset="0"/>
                         <a:cs typeface="Yu Gothic" charset="0"/>
                       </a:endParaRPr>
                     </a:p>
                   </a:txBody>
-                  <a:tcPr marL="76200" marR="76200" marT="76200" marB="76200" anchor="ctr">
+                  <a:tcPr marL="63500" marR="63500" marT="63500" marB="63500" anchor="ctr">
                     <a:lnL w="6350" cap="flat" cmpd="sng" algn="ctr">
                       <a:solidFill>
                         <a:srgbClr val="DDD5D2"/>
@@ -8472,7 +8472,7 @@
                         <a:buNone/>
                       </a:pPr>
                       <a:r>
-                        <a:rPr lang="en-US" sz="1200" b="1" dirty="0">
+                        <a:rPr lang="en-US" sz="1150" b="1" dirty="0">
                           <a:solidFill>
                             <a:srgbClr val="FFFFFF"/>
                           </a:solidFill>
@@ -8480,37 +8480,16 @@
                           <a:ea typeface="Yu Gothic" pitchFamily="34" charset="-122"/>
                           <a:cs typeface="Yu Gothic" pitchFamily="34" charset="-120"/>
                         </a:rPr>
-                        <a:t>AIマーケティング</a:t>
+                        <a:t>AIリール講座</a:t>
                       </a:r>
-                      <a:endParaRPr lang="en-US" sz="1200" dirty="0">
-                        <a:latin typeface="Yu Gothic" charset="0"/>
-                        <a:ea typeface="Yu Gothic" charset="0"/>
-                        <a:cs typeface="Yu Gothic" charset="0"/>
-                      </a:endParaRPr>
-                    </a:p>
-                    <a:p>
-                      <a:pPr algn="ctr" indent="0" marL="0">
-                        <a:buNone/>
-                      </a:pPr>
-                      <a:r>
-                        <a:rPr lang="en-US" sz="1200" b="1" dirty="0">
-                          <a:solidFill>
-                            <a:srgbClr val="FFFFFF"/>
-                          </a:solidFill>
-                          <a:latin typeface="Yu Gothic" pitchFamily="34" charset="0"/>
-                          <a:ea typeface="Yu Gothic" pitchFamily="34" charset="-122"/>
-                          <a:cs typeface="Yu Gothic" pitchFamily="34" charset="-120"/>
-                        </a:rPr>
-                        <a:t>集中講座</a:t>
-                      </a:r>
-                      <a:endParaRPr lang="en-US" sz="1200" dirty="0">
+                      <a:endParaRPr lang="en-US" sz="1150" dirty="0">
                         <a:latin typeface="Yu Gothic" charset="0"/>
                         <a:ea typeface="Yu Gothic" charset="0"/>
                         <a:cs typeface="Yu Gothic" charset="0"/>
                       </a:endParaRPr>
                     </a:p>
                   </a:txBody>
-                  <a:tcPr marL="76200" marR="76200" marT="76200" marB="76200" anchor="ctr">
+                  <a:tcPr marL="63500" marR="63500" marT="63500" marB="63500" anchor="ctr">
                     <a:lnL w="6350" cap="flat" cmpd="sng" algn="ctr">
                       <a:solidFill>
                         <a:srgbClr val="DDD5D2"/>
@@ -8561,7 +8540,7 @@
                         <a:buNone/>
                       </a:pPr>
                       <a:r>
-                        <a:rPr lang="en-US" sz="1200" b="1" dirty="0">
+                        <a:rPr lang="en-US" sz="1150" b="1" dirty="0">
                           <a:solidFill>
                             <a:srgbClr val="FFFFFF"/>
                           </a:solidFill>
@@ -8571,7 +8550,7 @@
                         </a:rPr>
                         <a:t>ファッション起業</a:t>
                       </a:r>
-                      <a:endParaRPr lang="en-US" sz="1200" dirty="0">
+                      <a:endParaRPr lang="en-US" sz="1150" dirty="0">
                         <a:latin typeface="Yu Gothic" charset="0"/>
                         <a:ea typeface="Yu Gothic" charset="0"/>
                         <a:cs typeface="Yu Gothic" charset="0"/>
@@ -8582,7 +8561,7 @@
                         <a:buNone/>
                       </a:pPr>
                       <a:r>
-                        <a:rPr lang="en-US" sz="1200" b="1" dirty="0">
+                        <a:rPr lang="en-US" sz="1150" b="1" dirty="0">
                           <a:solidFill>
                             <a:srgbClr val="FFFFFF"/>
                           </a:solidFill>
@@ -8592,14 +8571,14 @@
                         </a:rPr>
                         <a:t>AIマスター講座</a:t>
                       </a:r>
-                      <a:endParaRPr lang="en-US" sz="1200" dirty="0">
+                      <a:endParaRPr lang="en-US" sz="1150" dirty="0">
                         <a:latin typeface="Yu Gothic" charset="0"/>
                         <a:ea typeface="Yu Gothic" charset="0"/>
                         <a:cs typeface="Yu Gothic" charset="0"/>
                       </a:endParaRPr>
                     </a:p>
                   </a:txBody>
-                  <a:tcPr marL="76200" marR="76200" marT="76200" marB="76200" anchor="ctr">
+                  <a:tcPr marL="63500" marR="63500" marT="63500" marB="63500" anchor="ctr">
                     <a:lnL w="6350" cap="flat" cmpd="sng" algn="ctr">
                       <a:solidFill>
                         <a:srgbClr val="DDD5D2"/>
@@ -8642,7 +8621,7 @@
                   </a:tcPr>
                 </a:tc>
               </a:tr>
-              <a:tr h="384048">
+              <a:tr h="347472">
                 <a:tc>
                   <a:txBody>
                     <a:bodyPr/>
@@ -8652,7 +8631,7 @@
                         <a:buNone/>
                       </a:pPr>
                       <a:r>
-                        <a:rPr lang="en-US" sz="1200" dirty="0">
+                        <a:rPr lang="en-US" sz="1150" dirty="0">
                           <a:solidFill>
                             <a:srgbClr val="2B2B2B"/>
                           </a:solidFill>
@@ -8662,14 +8641,14 @@
                         </a:rPr>
                         <a:t>期間</a:t>
                       </a:r>
-                      <a:endParaRPr lang="en-US" sz="1200" dirty="0">
+                      <a:endParaRPr lang="en-US" sz="1150" dirty="0">
                         <a:latin typeface="Yu Gothic" charset="0"/>
                         <a:ea typeface="Yu Gothic" charset="0"/>
                         <a:cs typeface="Yu Gothic" charset="0"/>
                       </a:endParaRPr>
                     </a:p>
                   </a:txBody>
-                  <a:tcPr marL="76200" marR="76200" marT="76200" marB="76200" anchor="ctr">
+                  <a:tcPr marL="63500" marR="63500" marT="63500" marB="63500" anchor="ctr">
                     <a:lnL w="6350" cap="flat" cmpd="sng" algn="ctr">
                       <a:solidFill>
                         <a:srgbClr val="DDD5D2"/>
@@ -8717,7 +8696,7 @@
                         <a:buNone/>
                       </a:pPr>
                       <a:r>
-                        <a:rPr lang="en-US" sz="1200" dirty="0">
+                        <a:rPr lang="en-US" sz="1150" dirty="0">
                           <a:solidFill>
                             <a:srgbClr val="2B2B2B"/>
                           </a:solidFill>
@@ -8727,14 +8706,14 @@
                         </a:rPr>
                         <a:t>3ヶ月</a:t>
                       </a:r>
-                      <a:endParaRPr lang="en-US" sz="1200" dirty="0">
+                      <a:endParaRPr lang="en-US" sz="1150" dirty="0">
                         <a:latin typeface="Yu Gothic" charset="0"/>
                         <a:ea typeface="Yu Gothic" charset="0"/>
                         <a:cs typeface="Yu Gothic" charset="0"/>
                       </a:endParaRPr>
                     </a:p>
                   </a:txBody>
-                  <a:tcPr marL="76200" marR="76200" marT="76200" marB="76200" anchor="ctr">
+                  <a:tcPr marL="63500" marR="63500" marT="63500" marB="63500" anchor="ctr">
                     <a:lnL w="6350" cap="flat" cmpd="sng" algn="ctr">
                       <a:solidFill>
                         <a:srgbClr val="DDD5D2"/>
@@ -8782,7 +8761,7 @@
                         <a:buNone/>
                       </a:pPr>
                       <a:r>
-                        <a:rPr lang="en-US" sz="1200" dirty="0">
+                        <a:rPr lang="en-US" sz="1150" dirty="0">
                           <a:solidFill>
                             <a:srgbClr val="2B2B2B"/>
                           </a:solidFill>
@@ -8792,14 +8771,14 @@
                         </a:rPr>
                         <a:t>6ヶ月</a:t>
                       </a:r>
-                      <a:endParaRPr lang="en-US" sz="1200" dirty="0">
+                      <a:endParaRPr lang="en-US" sz="1150" dirty="0">
                         <a:latin typeface="Yu Gothic" charset="0"/>
                         <a:ea typeface="Yu Gothic" charset="0"/>
                         <a:cs typeface="Yu Gothic" charset="0"/>
                       </a:endParaRPr>
                     </a:p>
                   </a:txBody>
-                  <a:tcPr marL="76200" marR="76200" marT="76200" marB="76200" anchor="ctr">
+                  <a:tcPr marL="63500" marR="63500" marT="63500" marB="63500" anchor="ctr">
                     <a:lnL w="6350" cap="flat" cmpd="sng" algn="ctr">
                       <a:solidFill>
                         <a:srgbClr val="DDD5D2"/>
@@ -8839,7 +8818,7 @@
                   </a:tcPr>
                 </a:tc>
               </a:tr>
-              <a:tr h="384048">
+              <a:tr h="347472">
                 <a:tc>
                   <a:txBody>
                     <a:bodyPr/>
@@ -8849,7 +8828,7 @@
                         <a:buNone/>
                       </a:pPr>
                       <a:r>
-                        <a:rPr lang="en-US" sz="1200" dirty="0">
+                        <a:rPr lang="en-US" sz="1150" dirty="0">
                           <a:solidFill>
                             <a:srgbClr val="2B2B2B"/>
                           </a:solidFill>
@@ -8859,14 +8838,14 @@
                         </a:rPr>
                         <a:t>オンライン講座</a:t>
                       </a:r>
-                      <a:endParaRPr lang="en-US" sz="1200" dirty="0">
+                      <a:endParaRPr lang="en-US" sz="1150" dirty="0">
                         <a:latin typeface="Yu Gothic" charset="0"/>
                         <a:ea typeface="Yu Gothic" charset="0"/>
                         <a:cs typeface="Yu Gothic" charset="0"/>
                       </a:endParaRPr>
                     </a:p>
                   </a:txBody>
-                  <a:tcPr marL="76200" marR="76200" marT="76200" marB="76200" anchor="ctr">
+                  <a:tcPr marL="63500" marR="63500" marT="63500" marB="63500" anchor="ctr">
                     <a:lnL w="6350" cap="flat" cmpd="sng" algn="ctr">
                       <a:solidFill>
                         <a:srgbClr val="DDD5D2"/>
@@ -8914,7 +8893,7 @@
                         <a:buNone/>
                       </a:pPr>
                       <a:r>
-                        <a:rPr lang="en-US" sz="1200" dirty="0">
+                        <a:rPr lang="en-US" sz="1150" dirty="0">
                           <a:solidFill>
                             <a:srgbClr val="2B2B2B"/>
                           </a:solidFill>
@@ -8922,16 +8901,16 @@
                           <a:ea typeface="Yu Gothic" pitchFamily="34" charset="-122"/>
                           <a:cs typeface="Yu Gothic" pitchFamily="34" charset="-120"/>
                         </a:rPr>
-                        <a:t>6回（60分／回）</a:t>
+                        <a:t>3回（2時間／回）</a:t>
                       </a:r>
-                      <a:endParaRPr lang="en-US" sz="1200" dirty="0">
+                      <a:endParaRPr lang="en-US" sz="1150" dirty="0">
                         <a:latin typeface="Yu Gothic" charset="0"/>
                         <a:ea typeface="Yu Gothic" charset="0"/>
                         <a:cs typeface="Yu Gothic" charset="0"/>
                       </a:endParaRPr>
                     </a:p>
                   </a:txBody>
-                  <a:tcPr marL="76200" marR="76200" marT="76200" marB="76200" anchor="ctr">
+                  <a:tcPr marL="63500" marR="63500" marT="63500" marB="63500" anchor="ctr">
                     <a:lnL w="6350" cap="flat" cmpd="sng" algn="ctr">
                       <a:solidFill>
                         <a:srgbClr val="DDD5D2"/>
@@ -8979,7 +8958,7 @@
                         <a:buNone/>
                       </a:pPr>
                       <a:r>
-                        <a:rPr lang="en-US" sz="1200" dirty="0">
+                        <a:rPr lang="en-US" sz="1150" dirty="0">
                           <a:solidFill>
                             <a:srgbClr val="2B2B2B"/>
                           </a:solidFill>
@@ -8987,16 +8966,16 @@
                           <a:ea typeface="Yu Gothic" pitchFamily="34" charset="-122"/>
                           <a:cs typeface="Yu Gothic" pitchFamily="34" charset="-120"/>
                         </a:rPr>
-                        <a:t>8回（90分／回）</a:t>
+                        <a:t>6回（2時間／回）</a:t>
                       </a:r>
-                      <a:endParaRPr lang="en-US" sz="1200" dirty="0">
+                      <a:endParaRPr lang="en-US" sz="1150" dirty="0">
                         <a:latin typeface="Yu Gothic" charset="0"/>
                         <a:ea typeface="Yu Gothic" charset="0"/>
                         <a:cs typeface="Yu Gothic" charset="0"/>
                       </a:endParaRPr>
                     </a:p>
                   </a:txBody>
-                  <a:tcPr marL="76200" marR="76200" marT="76200" marB="76200" anchor="ctr">
+                  <a:tcPr marL="63500" marR="63500" marT="63500" marB="63500" anchor="ctr">
                     <a:lnL w="6350" cap="flat" cmpd="sng" algn="ctr">
                       <a:solidFill>
                         <a:srgbClr val="DDD5D2"/>
@@ -9036,7 +9015,7 @@
                   </a:tcPr>
                 </a:tc>
               </a:tr>
-              <a:tr h="384048">
+              <a:tr h="347472">
                 <a:tc>
                   <a:txBody>
                     <a:bodyPr/>
@@ -9046,7 +9025,7 @@
                         <a:buNone/>
                       </a:pPr>
                       <a:r>
-                        <a:rPr lang="en-US" sz="1200" dirty="0">
+                        <a:rPr lang="en-US" sz="1150" dirty="0">
                           <a:solidFill>
                             <a:srgbClr val="2B2B2B"/>
                           </a:solidFill>
@@ -9056,14 +9035,14 @@
                         </a:rPr>
                         <a:t>対面ワークショップ</a:t>
                       </a:r>
-                      <a:endParaRPr lang="en-US" sz="1200" dirty="0">
+                      <a:endParaRPr lang="en-US" sz="1150" dirty="0">
                         <a:latin typeface="Yu Gothic" charset="0"/>
                         <a:ea typeface="Yu Gothic" charset="0"/>
                         <a:cs typeface="Yu Gothic" charset="0"/>
                       </a:endParaRPr>
                     </a:p>
                   </a:txBody>
-                  <a:tcPr marL="76200" marR="76200" marT="76200" marB="76200" anchor="ctr">
+                  <a:tcPr marL="63500" marR="63500" marT="63500" marB="63500" anchor="ctr">
                     <a:lnL w="6350" cap="flat" cmpd="sng" algn="ctr">
                       <a:solidFill>
                         <a:srgbClr val="DDD5D2"/>
@@ -9111,7 +9090,7 @@
                         <a:buNone/>
                       </a:pPr>
                       <a:r>
-                        <a:rPr lang="en-US" sz="1200" dirty="0">
+                        <a:rPr lang="en-US" sz="1150" dirty="0">
                           <a:solidFill>
                             <a:srgbClr val="2B2B2B"/>
                           </a:solidFill>
@@ -9119,16 +9098,16 @@
                           <a:ea typeface="Yu Gothic" pitchFamily="34" charset="-122"/>
                           <a:cs typeface="Yu Gothic" pitchFamily="34" charset="-120"/>
                         </a:rPr>
-                        <a:t>—</a:t>
+                        <a:t>1回</a:t>
                       </a:r>
-                      <a:endParaRPr lang="en-US" sz="1200" dirty="0">
+                      <a:endParaRPr lang="en-US" sz="1150" dirty="0">
                         <a:latin typeface="Yu Gothic" charset="0"/>
                         <a:ea typeface="Yu Gothic" charset="0"/>
                         <a:cs typeface="Yu Gothic" charset="0"/>
                       </a:endParaRPr>
                     </a:p>
                   </a:txBody>
-                  <a:tcPr marL="76200" marR="76200" marT="76200" marB="76200" anchor="ctr">
+                  <a:tcPr marL="63500" marR="63500" marT="63500" marB="63500" anchor="ctr">
                     <a:lnL w="6350" cap="flat" cmpd="sng" algn="ctr">
                       <a:solidFill>
                         <a:srgbClr val="DDD5D2"/>
@@ -9176,7 +9155,7 @@
                         <a:buNone/>
                       </a:pPr>
                       <a:r>
-                        <a:rPr lang="en-US" sz="1200" dirty="0">
+                        <a:rPr lang="en-US" sz="1150" dirty="0">
                           <a:solidFill>
                             <a:srgbClr val="2B2B2B"/>
                           </a:solidFill>
@@ -9184,16 +9163,16 @@
                           <a:ea typeface="Yu Gothic" pitchFamily="34" charset="-122"/>
                           <a:cs typeface="Yu Gothic" pitchFamily="34" charset="-120"/>
                         </a:rPr>
-                        <a:t>3回（東京・オンライン可）</a:t>
+                        <a:t>6回</a:t>
                       </a:r>
-                      <a:endParaRPr lang="en-US" sz="1200" dirty="0">
+                      <a:endParaRPr lang="en-US" sz="1150" dirty="0">
                         <a:latin typeface="Yu Gothic" charset="0"/>
                         <a:ea typeface="Yu Gothic" charset="0"/>
                         <a:cs typeface="Yu Gothic" charset="0"/>
                       </a:endParaRPr>
                     </a:p>
                   </a:txBody>
-                  <a:tcPr marL="76200" marR="76200" marT="76200" marB="76200" anchor="ctr">
+                  <a:tcPr marL="63500" marR="63500" marT="63500" marB="63500" anchor="ctr">
                     <a:lnL w="6350" cap="flat" cmpd="sng" algn="ctr">
                       <a:solidFill>
                         <a:srgbClr val="DDD5D2"/>
@@ -9233,7 +9212,7 @@
                   </a:tcPr>
                 </a:tc>
               </a:tr>
-              <a:tr h="384048">
+              <a:tr h="347472">
                 <a:tc>
                   <a:txBody>
                     <a:bodyPr/>
@@ -9243,7 +9222,7 @@
                         <a:buNone/>
                       </a:pPr>
                       <a:r>
-                        <a:rPr lang="en-US" sz="1200" dirty="0">
+                        <a:rPr lang="en-US" sz="1150" dirty="0">
                           <a:solidFill>
                             <a:srgbClr val="2B2B2B"/>
                           </a:solidFill>
@@ -9251,16 +9230,16 @@
                           <a:ea typeface="Yu Gothic" pitchFamily="34" charset="-122"/>
                           <a:cs typeface="Yu Gothic" pitchFamily="34" charset="-120"/>
                         </a:rPr>
-                        <a:t>個別のサポート</a:t>
+                        <a:t>質問会</a:t>
                       </a:r>
-                      <a:endParaRPr lang="en-US" sz="1200" dirty="0">
+                      <a:endParaRPr lang="en-US" sz="1150" dirty="0">
                         <a:latin typeface="Yu Gothic" charset="0"/>
                         <a:ea typeface="Yu Gothic" charset="0"/>
                         <a:cs typeface="Yu Gothic" charset="0"/>
                       </a:endParaRPr>
                     </a:p>
                   </a:txBody>
-                  <a:tcPr marL="76200" marR="76200" marT="76200" marB="76200" anchor="ctr">
+                  <a:tcPr marL="63500" marR="63500" marT="63500" marB="63500" anchor="ctr">
                     <a:lnL w="6350" cap="flat" cmpd="sng" algn="ctr">
                       <a:solidFill>
                         <a:srgbClr val="DDD5D2"/>
@@ -9308,7 +9287,7 @@
                         <a:buNone/>
                       </a:pPr>
                       <a:r>
-                        <a:rPr lang="en-US" sz="1200" dirty="0">
+                        <a:rPr lang="en-US" sz="1150" dirty="0">
                           <a:solidFill>
                             <a:srgbClr val="2B2B2B"/>
                           </a:solidFill>
@@ -9316,16 +9295,16 @@
                           <a:ea typeface="Yu Gothic" pitchFamily="34" charset="-122"/>
                           <a:cs typeface="Yu Gothic" pitchFamily="34" charset="-120"/>
                         </a:rPr>
-                        <a:t>個別面談 1回</a:t>
+                        <a:t>2回（2時間／回）</a:t>
                       </a:r>
-                      <a:endParaRPr lang="en-US" sz="1200" dirty="0">
+                      <a:endParaRPr lang="en-US" sz="1150" dirty="0">
                         <a:latin typeface="Yu Gothic" charset="0"/>
                         <a:ea typeface="Yu Gothic" charset="0"/>
                         <a:cs typeface="Yu Gothic" charset="0"/>
                       </a:endParaRPr>
                     </a:p>
                   </a:txBody>
-                  <a:tcPr marL="76200" marR="76200" marT="76200" marB="76200" anchor="ctr">
+                  <a:tcPr marL="63500" marR="63500" marT="63500" marB="63500" anchor="ctr">
                     <a:lnL w="6350" cap="flat" cmpd="sng" algn="ctr">
                       <a:solidFill>
                         <a:srgbClr val="DDD5D2"/>
@@ -9373,7 +9352,7 @@
                         <a:buNone/>
                       </a:pPr>
                       <a:r>
-                        <a:rPr lang="en-US" sz="1200" dirty="0">
+                        <a:rPr lang="en-US" sz="1150" dirty="0">
                           <a:solidFill>
                             <a:srgbClr val="2B2B2B"/>
                           </a:solidFill>
@@ -9381,16 +9360,16 @@
                           <a:ea typeface="Yu Gothic" pitchFamily="34" charset="-122"/>
                           <a:cs typeface="Yu Gothic" pitchFamily="34" charset="-120"/>
                         </a:rPr>
-                        <a:t>事前・事後の個別サポート</a:t>
+                        <a:t>6回（2時間／回）</a:t>
                       </a:r>
-                      <a:endParaRPr lang="en-US" sz="1200" dirty="0">
+                      <a:endParaRPr lang="en-US" sz="1150" dirty="0">
                         <a:latin typeface="Yu Gothic" charset="0"/>
                         <a:ea typeface="Yu Gothic" charset="0"/>
                         <a:cs typeface="Yu Gothic" charset="0"/>
                       </a:endParaRPr>
                     </a:p>
                   </a:txBody>
-                  <a:tcPr marL="76200" marR="76200" marT="76200" marB="76200" anchor="ctr">
+                  <a:tcPr marL="63500" marR="63500" marT="63500" marB="63500" anchor="ctr">
                     <a:lnL w="6350" cap="flat" cmpd="sng" algn="ctr">
                       <a:solidFill>
                         <a:srgbClr val="DDD5D2"/>
@@ -9430,7 +9409,7 @@
                   </a:tcPr>
                 </a:tc>
               </a:tr>
-              <a:tr h="384048">
+              <a:tr h="347472">
                 <a:tc>
                   <a:txBody>
                     <a:bodyPr/>
@@ -9440,7 +9419,7 @@
                         <a:buNone/>
                       </a:pPr>
                       <a:r>
-                        <a:rPr lang="en-US" sz="1200" dirty="0">
+                        <a:rPr lang="en-US" sz="1150" dirty="0">
                           <a:solidFill>
                             <a:srgbClr val="2B2B2B"/>
                           </a:solidFill>
@@ -9448,16 +9427,16 @@
                           <a:ea typeface="Yu Gothic" pitchFamily="34" charset="-122"/>
                           <a:cs typeface="Yu Gothic" pitchFamily="34" charset="-120"/>
                         </a:rPr>
-                        <a:t>質問</a:t>
+                        <a:t>事前の個別サポート</a:t>
                       </a:r>
-                      <a:endParaRPr lang="en-US" sz="1200" dirty="0">
+                      <a:endParaRPr lang="en-US" sz="1150" dirty="0">
                         <a:latin typeface="Yu Gothic" charset="0"/>
                         <a:ea typeface="Yu Gothic" charset="0"/>
                         <a:cs typeface="Yu Gothic" charset="0"/>
                       </a:endParaRPr>
                     </a:p>
                   </a:txBody>
-                  <a:tcPr marL="76200" marR="76200" marT="76200" marB="76200" anchor="ctr">
+                  <a:tcPr marL="63500" marR="63500" marT="63500" marB="63500" anchor="ctr">
                     <a:lnL w="6350" cap="flat" cmpd="sng" algn="ctr">
                       <a:solidFill>
                         <a:srgbClr val="DDD5D2"/>
@@ -9505,7 +9484,7 @@
                         <a:buNone/>
                       </a:pPr>
                       <a:r>
-                        <a:rPr lang="en-US" sz="1200" dirty="0">
+                        <a:rPr lang="en-US" sz="1150" dirty="0">
                           <a:solidFill>
                             <a:srgbClr val="2B2B2B"/>
                           </a:solidFill>
@@ -9513,16 +9492,16 @@
                           <a:ea typeface="Yu Gothic" pitchFamily="34" charset="-122"/>
                           <a:cs typeface="Yu Gothic" pitchFamily="34" charset="-120"/>
                         </a:rPr>
-                        <a:t>質問し放題</a:t>
+                        <a:t>1回</a:t>
                       </a:r>
-                      <a:endParaRPr lang="en-US" sz="1200" dirty="0">
+                      <a:endParaRPr lang="en-US" sz="1150" dirty="0">
                         <a:latin typeface="Yu Gothic" charset="0"/>
                         <a:ea typeface="Yu Gothic" charset="0"/>
                         <a:cs typeface="Yu Gothic" charset="0"/>
                       </a:endParaRPr>
                     </a:p>
                   </a:txBody>
-                  <a:tcPr marL="76200" marR="76200" marT="76200" marB="76200" anchor="ctr">
+                  <a:tcPr marL="63500" marR="63500" marT="63500" marB="63500" anchor="ctr">
                     <a:lnL w="6350" cap="flat" cmpd="sng" algn="ctr">
                       <a:solidFill>
                         <a:srgbClr val="DDD5D2"/>
@@ -9570,7 +9549,7 @@
                         <a:buNone/>
                       </a:pPr>
                       <a:r>
-                        <a:rPr lang="en-US" sz="1200" dirty="0">
+                        <a:rPr lang="en-US" sz="1150" dirty="0">
                           <a:solidFill>
                             <a:srgbClr val="2B2B2B"/>
                           </a:solidFill>
@@ -9578,16 +9557,16 @@
                           <a:ea typeface="Yu Gothic" pitchFamily="34" charset="-122"/>
                           <a:cs typeface="Yu Gothic" pitchFamily="34" charset="-120"/>
                         </a:rPr>
-                        <a:t>チャットサポート</a:t>
+                        <a:t>1回</a:t>
                       </a:r>
-                      <a:endParaRPr lang="en-US" sz="1200" dirty="0">
+                      <a:endParaRPr lang="en-US" sz="1150" dirty="0">
                         <a:latin typeface="Yu Gothic" charset="0"/>
                         <a:ea typeface="Yu Gothic" charset="0"/>
                         <a:cs typeface="Yu Gothic" charset="0"/>
                       </a:endParaRPr>
                     </a:p>
                   </a:txBody>
-                  <a:tcPr marL="76200" marR="76200" marT="76200" marB="76200" anchor="ctr">
+                  <a:tcPr marL="63500" marR="63500" marT="63500" marB="63500" anchor="ctr">
                     <a:lnL w="6350" cap="flat" cmpd="sng" algn="ctr">
                       <a:solidFill>
                         <a:srgbClr val="DDD5D2"/>
@@ -9627,7 +9606,7 @@
                   </a:tcPr>
                 </a:tc>
               </a:tr>
-              <a:tr h="384048">
+              <a:tr h="347472">
                 <a:tc>
                   <a:txBody>
                     <a:bodyPr/>
@@ -9637,7 +9616,7 @@
                         <a:buNone/>
                       </a:pPr>
                       <a:r>
-                        <a:rPr lang="en-US" sz="1200" dirty="0">
+                        <a:rPr lang="en-US" sz="1150" dirty="0">
                           <a:solidFill>
                             <a:srgbClr val="2B2B2B"/>
                           </a:solidFill>
@@ -9645,16 +9624,16 @@
                           <a:ea typeface="Yu Gothic" pitchFamily="34" charset="-122"/>
                           <a:cs typeface="Yu Gothic" pitchFamily="34" charset="-120"/>
                         </a:rPr>
-                        <a:t>会員サイト</a:t>
+                        <a:t>動画講座</a:t>
                       </a:r>
-                      <a:endParaRPr lang="en-US" sz="1200" dirty="0">
+                      <a:endParaRPr lang="en-US" sz="1150" dirty="0">
                         <a:latin typeface="Yu Gothic" charset="0"/>
                         <a:ea typeface="Yu Gothic" charset="0"/>
                         <a:cs typeface="Yu Gothic" charset="0"/>
                       </a:endParaRPr>
                     </a:p>
                   </a:txBody>
-                  <a:tcPr marL="76200" marR="76200" marT="76200" marB="76200" anchor="ctr">
+                  <a:tcPr marL="63500" marR="63500" marT="63500" marB="63500" anchor="ctr">
                     <a:lnL w="6350" cap="flat" cmpd="sng" algn="ctr">
                       <a:solidFill>
                         <a:srgbClr val="DDD5D2"/>
@@ -9702,7 +9681,7 @@
                         <a:buNone/>
                       </a:pPr>
                       <a:r>
-                        <a:rPr lang="en-US" sz="1200" dirty="0">
+                        <a:rPr lang="en-US" sz="1150" dirty="0">
                           <a:solidFill>
                             <a:srgbClr val="2B2B2B"/>
                           </a:solidFill>
@@ -9710,16 +9689,16 @@
                           <a:ea typeface="Yu Gothic" pitchFamily="34" charset="-122"/>
                           <a:cs typeface="Yu Gothic" pitchFamily="34" charset="-120"/>
                         </a:rPr>
-                        <a:t>あり</a:t>
+                        <a:t>見放題</a:t>
                       </a:r>
-                      <a:endParaRPr lang="en-US" sz="1200" dirty="0">
+                      <a:endParaRPr lang="en-US" sz="1150" dirty="0">
                         <a:latin typeface="Yu Gothic" charset="0"/>
                         <a:ea typeface="Yu Gothic" charset="0"/>
                         <a:cs typeface="Yu Gothic" charset="0"/>
                       </a:endParaRPr>
                     </a:p>
                   </a:txBody>
-                  <a:tcPr marL="76200" marR="76200" marT="76200" marB="76200" anchor="ctr">
+                  <a:tcPr marL="63500" marR="63500" marT="63500" marB="63500" anchor="ctr">
                     <a:lnL w="6350" cap="flat" cmpd="sng" algn="ctr">
                       <a:solidFill>
                         <a:srgbClr val="DDD5D2"/>
@@ -9767,7 +9746,7 @@
                         <a:buNone/>
                       </a:pPr>
                       <a:r>
-                        <a:rPr lang="en-US" sz="1200" dirty="0">
+                        <a:rPr lang="en-US" sz="1150" dirty="0">
                           <a:solidFill>
                             <a:srgbClr val="2B2B2B"/>
                           </a:solidFill>
@@ -9775,16 +9754,213 @@
                           <a:ea typeface="Yu Gothic" pitchFamily="34" charset="-122"/>
                           <a:cs typeface="Yu Gothic" pitchFamily="34" charset="-120"/>
                         </a:rPr>
-                        <a:t>あり</a:t>
+                        <a:t>見放題</a:t>
                       </a:r>
-                      <a:endParaRPr lang="en-US" sz="1200" dirty="0">
+                      <a:endParaRPr lang="en-US" sz="1150" dirty="0">
                         <a:latin typeface="Yu Gothic" charset="0"/>
                         <a:ea typeface="Yu Gothic" charset="0"/>
                         <a:cs typeface="Yu Gothic" charset="0"/>
                       </a:endParaRPr>
                     </a:p>
                   </a:txBody>
-                  <a:tcPr marL="76200" marR="76200" marT="76200" marB="76200" anchor="ctr">
+                  <a:tcPr marL="63500" marR="63500" marT="63500" marB="63500" anchor="ctr">
+                    <a:lnL w="6350" cap="flat" cmpd="sng" algn="ctr">
+                      <a:solidFill>
+                        <a:srgbClr val="DDD5D2"/>
+                      </a:solidFill>
+                      <a:prstDash val="solid"/>
+                      <a:round/>
+                      <a:headEnd type="none" w="med" len="med"/>
+                      <a:tailEnd type="none" w="med" len="med"/>
+                    </a:lnL>
+                    <a:lnR w="6350" cap="flat" cmpd="sng" algn="ctr">
+                      <a:solidFill>
+                        <a:srgbClr val="DDD5D2"/>
+                      </a:solidFill>
+                      <a:prstDash val="solid"/>
+                      <a:round/>
+                      <a:headEnd type="none" w="med" len="med"/>
+                      <a:tailEnd type="none" w="med" len="med"/>
+                    </a:lnR>
+                    <a:lnT w="6350" cap="flat" cmpd="sng" algn="ctr">
+                      <a:solidFill>
+                        <a:srgbClr val="DDD5D2"/>
+                      </a:solidFill>
+                      <a:prstDash val="solid"/>
+                      <a:round/>
+                      <a:headEnd type="none" w="med" len="med"/>
+                      <a:tailEnd type="none" w="med" len="med"/>
+                    </a:lnT>
+                    <a:lnB w="6350" cap="flat" cmpd="sng" algn="ctr">
+                      <a:solidFill>
+                        <a:srgbClr val="DDD5D2"/>
+                      </a:solidFill>
+                      <a:prstDash val="solid"/>
+                      <a:round/>
+                      <a:headEnd type="none" w="med" len="med"/>
+                      <a:tailEnd type="none" w="med" len="med"/>
+                    </a:lnB>
+                  </a:tcPr>
+                </a:tc>
+              </a:tr>
+              <a:tr h="347472">
+                <a:tc>
+                  <a:txBody>
+                    <a:bodyPr/>
+                    <a:lstStyle/>
+                    <a:p>
+                      <a:pPr indent="0" marL="0">
+                        <a:buNone/>
+                      </a:pPr>
+                      <a:r>
+                        <a:rPr lang="en-US" sz="1150" dirty="0">
+                          <a:solidFill>
+                            <a:srgbClr val="2B2B2B"/>
+                          </a:solidFill>
+                          <a:latin typeface="Yu Gothic" pitchFamily="34" charset="0"/>
+                          <a:ea typeface="Yu Gothic" pitchFamily="34" charset="-122"/>
+                          <a:cs typeface="Yu Gothic" pitchFamily="34" charset="-120"/>
+                        </a:rPr>
+                        <a:t>質問し放題</a:t>
+                      </a:r>
+                      <a:endParaRPr lang="en-US" sz="1150" dirty="0">
+                        <a:latin typeface="Yu Gothic" charset="0"/>
+                        <a:ea typeface="Yu Gothic" charset="0"/>
+                        <a:cs typeface="Yu Gothic" charset="0"/>
+                      </a:endParaRPr>
+                    </a:p>
+                  </a:txBody>
+                  <a:tcPr marL="63500" marR="63500" marT="63500" marB="63500" anchor="ctr">
+                    <a:lnL w="6350" cap="flat" cmpd="sng" algn="ctr">
+                      <a:solidFill>
+                        <a:srgbClr val="DDD5D2"/>
+                      </a:solidFill>
+                      <a:prstDash val="solid"/>
+                      <a:round/>
+                      <a:headEnd type="none" w="med" len="med"/>
+                      <a:tailEnd type="none" w="med" len="med"/>
+                    </a:lnL>
+                    <a:lnR w="6350" cap="flat" cmpd="sng" algn="ctr">
+                      <a:solidFill>
+                        <a:srgbClr val="DDD5D2"/>
+                      </a:solidFill>
+                      <a:prstDash val="solid"/>
+                      <a:round/>
+                      <a:headEnd type="none" w="med" len="med"/>
+                      <a:tailEnd type="none" w="med" len="med"/>
+                    </a:lnR>
+                    <a:lnT w="6350" cap="flat" cmpd="sng" algn="ctr">
+                      <a:solidFill>
+                        <a:srgbClr val="DDD5D2"/>
+                      </a:solidFill>
+                      <a:prstDash val="solid"/>
+                      <a:round/>
+                      <a:headEnd type="none" w="med" len="med"/>
+                      <a:tailEnd type="none" w="med" len="med"/>
+                    </a:lnT>
+                    <a:lnB w="6350" cap="flat" cmpd="sng" algn="ctr">
+                      <a:solidFill>
+                        <a:srgbClr val="DDD5D2"/>
+                      </a:solidFill>
+                      <a:prstDash val="solid"/>
+                      <a:round/>
+                      <a:headEnd type="none" w="med" len="med"/>
+                      <a:tailEnd type="none" w="med" len="med"/>
+                    </a:lnB>
+                  </a:tcPr>
+                </a:tc>
+                <a:tc>
+                  <a:txBody>
+                    <a:bodyPr/>
+                    <a:lstStyle/>
+                    <a:p>
+                      <a:pPr indent="0" marL="0">
+                        <a:buNone/>
+                      </a:pPr>
+                      <a:r>
+                        <a:rPr lang="en-US" sz="1150" dirty="0">
+                          <a:solidFill>
+                            <a:srgbClr val="2B2B2B"/>
+                          </a:solidFill>
+                          <a:latin typeface="Yu Gothic" pitchFamily="34" charset="0"/>
+                          <a:ea typeface="Yu Gothic" pitchFamily="34" charset="-122"/>
+                          <a:cs typeface="Yu Gothic" pitchFamily="34" charset="-120"/>
+                        </a:rPr>
+                        <a:t>チャット</a:t>
+                      </a:r>
+                      <a:endParaRPr lang="en-US" sz="1150" dirty="0">
+                        <a:latin typeface="Yu Gothic" charset="0"/>
+                        <a:ea typeface="Yu Gothic" charset="0"/>
+                        <a:cs typeface="Yu Gothic" charset="0"/>
+                      </a:endParaRPr>
+                    </a:p>
+                  </a:txBody>
+                  <a:tcPr marL="63500" marR="63500" marT="63500" marB="63500" anchor="ctr">
+                    <a:lnL w="6350" cap="flat" cmpd="sng" algn="ctr">
+                      <a:solidFill>
+                        <a:srgbClr val="DDD5D2"/>
+                      </a:solidFill>
+                      <a:prstDash val="solid"/>
+                      <a:round/>
+                      <a:headEnd type="none" w="med" len="med"/>
+                      <a:tailEnd type="none" w="med" len="med"/>
+                    </a:lnL>
+                    <a:lnR w="6350" cap="flat" cmpd="sng" algn="ctr">
+                      <a:solidFill>
+                        <a:srgbClr val="DDD5D2"/>
+                      </a:solidFill>
+                      <a:prstDash val="solid"/>
+                      <a:round/>
+                      <a:headEnd type="none" w="med" len="med"/>
+                      <a:tailEnd type="none" w="med" len="med"/>
+                    </a:lnR>
+                    <a:lnT w="6350" cap="flat" cmpd="sng" algn="ctr">
+                      <a:solidFill>
+                        <a:srgbClr val="DDD5D2"/>
+                      </a:solidFill>
+                      <a:prstDash val="solid"/>
+                      <a:round/>
+                      <a:headEnd type="none" w="med" len="med"/>
+                      <a:tailEnd type="none" w="med" len="med"/>
+                    </a:lnT>
+                    <a:lnB w="6350" cap="flat" cmpd="sng" algn="ctr">
+                      <a:solidFill>
+                        <a:srgbClr val="DDD5D2"/>
+                      </a:solidFill>
+                      <a:prstDash val="solid"/>
+                      <a:round/>
+                      <a:headEnd type="none" w="med" len="med"/>
+                      <a:tailEnd type="none" w="med" len="med"/>
+                    </a:lnB>
+                  </a:tcPr>
+                </a:tc>
+                <a:tc>
+                  <a:txBody>
+                    <a:bodyPr/>
+                    <a:lstStyle/>
+                    <a:p>
+                      <a:pPr indent="0" marL="0">
+                        <a:buNone/>
+                      </a:pPr>
+                      <a:r>
+                        <a:rPr lang="en-US" sz="1150" dirty="0">
+                          <a:solidFill>
+                            <a:srgbClr val="2B2B2B"/>
+                          </a:solidFill>
+                          <a:latin typeface="Yu Gothic" pitchFamily="34" charset="0"/>
+                          <a:ea typeface="Yu Gothic" pitchFamily="34" charset="-122"/>
+                          <a:cs typeface="Yu Gothic" pitchFamily="34" charset="-120"/>
+                        </a:rPr>
+                        <a:t>チャット＋必要ならZoomも</a:t>
+                      </a:r>
+                      <a:endParaRPr lang="en-US" sz="1150" dirty="0">
+                        <a:latin typeface="Yu Gothic" charset="0"/>
+                        <a:ea typeface="Yu Gothic" charset="0"/>
+                        <a:cs typeface="Yu Gothic" charset="0"/>
+                      </a:endParaRPr>
+                    </a:p>
+                  </a:txBody>
+                  <a:tcPr marL="63500" marR="63500" marT="63500" marB="63500" anchor="ctr">
                     <a:lnL w="6350" cap="flat" cmpd="sng" algn="ctr">
                       <a:solidFill>
                         <a:srgbClr val="DDD5D2"/>
@@ -9836,7 +10012,7 @@
         </p:nvSpPr>
         <p:spPr>
           <a:xfrm>
-            <a:off x="566928" y="4261104"/>
+            <a:off x="566928" y="4224528"/>
             <a:ext cx="8010144" cy="292608"/>
           </a:xfrm>
           <a:prstGeom prst="rect">
@@ -9861,7 +10037,7 @@
                 <a:ea typeface="Yu Gothic" pitchFamily="34" charset="-122"/>
                 <a:cs typeface="Yu Gothic" pitchFamily="34" charset="-120"/>
               </a:rPr>
-              <a:t>対面ワークショップは1回3時間程度。東京に来られない方は、オンラインでご参加いただけます。</a:t>
+              <a:t>対面ワークショップは10:00-15:00、東京です。マスター講座はオンラインでもご参加いただけます。</a:t>
             </a:r>
             <a:endParaRPr lang="en-US" sz="1100" dirty="0"/>
           </a:p>
@@ -9875,7 +10051,7 @@
         </p:nvSpPr>
         <p:spPr>
           <a:xfrm>
-            <a:off x="566928" y="4572000"/>
+            <a:off x="566928" y="4535424"/>
             <a:ext cx="8010144" cy="411480"/>
           </a:xfrm>
           <a:prstGeom prst="rect">
@@ -9986,11 +10162,11 @@
         <p:spPr>
           <a:xfrm>
             <a:off x="566928" y="1325880"/>
-            <a:ext cx="3913632" cy="2651760"/>
+            <a:ext cx="3913632" cy="2743200"/>
           </a:xfrm>
           <a:prstGeom prst="roundRect">
             <a:avLst>
-              <a:gd name="adj" fmla="val 2759"/>
+              <a:gd name="adj" fmla="val 2667"/>
             </a:avLst>
           </a:prstGeom>
           <a:solidFill>
@@ -10032,7 +10208,7 @@
                 <a:ea typeface="Yu Gothic" pitchFamily="34" charset="-122"/>
                 <a:cs typeface="Yu Gothic" pitchFamily="34" charset="-120"/>
               </a:rPr>
-              <a:t>まず、ご自分で進めたい方</a:t>
+              <a:t>まず、リールから始めたい方</a:t>
             </a:r>
             <a:endParaRPr lang="en-US" sz="1600" dirty="0"/>
           </a:p>
@@ -10071,7 +10247,7 @@
                 <a:ea typeface="Yu Gothic" pitchFamily="34" charset="-122"/>
                 <a:cs typeface="Yu Gothic" pitchFamily="34" charset="-120"/>
               </a:rPr>
-              <a:t>AIマーケティング集中講座</a:t>
+              <a:t>AIリール講座</a:t>
             </a:r>
             <a:endParaRPr lang="en-US" sz="1400" dirty="0"/>
           </a:p>
@@ -10085,8 +10261,8 @@
         </p:nvSpPr>
         <p:spPr>
           <a:xfrm>
-            <a:off x="841248" y="2468880"/>
-            <a:ext cx="3383280" cy="1280160"/>
+            <a:off x="841248" y="2450592"/>
+            <a:ext cx="3383280" cy="1371600"/>
           </a:xfrm>
           <a:prstGeom prst="rect">
             <a:avLst/>
@@ -10113,7 +10289,7 @@
                 <a:ea typeface="Yu Gothic" pitchFamily="34" charset="-122"/>
                 <a:cs typeface="Yu Gothic" pitchFamily="34" charset="-120"/>
               </a:rPr>
-              <a:t>オンラインだけで完結します。</a:t>
+              <a:t>3ヶ月。オンライン3回と、</a:t>
             </a:r>
             <a:endParaRPr lang="en-US" sz="1400" dirty="0"/>
           </a:p>
@@ -10133,7 +10309,7 @@
                 <a:ea typeface="Yu Gothic" pitchFamily="34" charset="-122"/>
                 <a:cs typeface="Yu Gothic" pitchFamily="34" charset="-120"/>
               </a:rPr>
-              <a:t>3ヶ月、6回。</a:t>
+              <a:t>対面ワークショップが1回。</a:t>
             </a:r>
             <a:endParaRPr lang="en-US" sz="1400" dirty="0"/>
           </a:p>
@@ -10153,7 +10329,7 @@
                 <a:ea typeface="Yu Gothic" pitchFamily="34" charset="-122"/>
                 <a:cs typeface="Yu Gothic" pitchFamily="34" charset="-120"/>
               </a:rPr>
-              <a:t>質問はいつでもしてください。</a:t>
+              <a:t>質問は、チャットでお受けします。</a:t>
             </a:r>
             <a:endParaRPr lang="en-US" sz="1400" dirty="0"/>
           </a:p>
@@ -10168,11 +10344,11 @@
         <p:spPr>
           <a:xfrm>
             <a:off x="4663440" y="1325880"/>
-            <a:ext cx="3913632" cy="2651760"/>
+            <a:ext cx="3913632" cy="2743200"/>
           </a:xfrm>
           <a:prstGeom prst="roundRect">
             <a:avLst>
-              <a:gd name="adj" fmla="val 2759"/>
+              <a:gd name="adj" fmla="val 2667"/>
             </a:avLst>
           </a:prstGeom>
           <a:solidFill>
@@ -10214,7 +10390,7 @@
                 <a:ea typeface="Yu Gothic" pitchFamily="34" charset="-122"/>
                 <a:cs typeface="Yu Gothic" pitchFamily="34" charset="-120"/>
               </a:rPr>
-              <a:t>お会いして、一緒にやりたい方</a:t>
+              <a:t>仕事の形まで作りたい方</a:t>
             </a:r>
             <a:endParaRPr lang="en-US" sz="1600" dirty="0"/>
           </a:p>
@@ -10229,7 +10405,7 @@
         <p:spPr>
           <a:xfrm>
             <a:off x="4937760" y="2011680"/>
-            <a:ext cx="3383280" cy="365760"/>
+            <a:ext cx="3474720" cy="365760"/>
           </a:xfrm>
           <a:prstGeom prst="rect">
             <a:avLst/>
@@ -10267,8 +10443,8 @@
         </p:nvSpPr>
         <p:spPr>
           <a:xfrm>
-            <a:off x="4937760" y="2395728"/>
-            <a:ext cx="3383280" cy="1554480"/>
+            <a:off x="4937760" y="2450592"/>
+            <a:ext cx="3383280" cy="1371600"/>
           </a:xfrm>
           <a:prstGeom prst="rect">
             <a:avLst/>
@@ -10282,7 +10458,7 @@
           <a:p>
             <a:pPr indent="0" marL="0">
               <a:lnSpc>
-                <a:spcPts val="2500"/>
+                <a:spcPts val="2600"/>
               </a:lnSpc>
               <a:buNone/>
             </a:pPr>
@@ -10295,14 +10471,14 @@
                 <a:ea typeface="Yu Gothic" pitchFamily="34" charset="-122"/>
                 <a:cs typeface="Yu Gothic" pitchFamily="34" charset="-120"/>
               </a:rPr>
-              <a:t>東京で3回、お会いします。</a:t>
+              <a:t>6ヶ月。毎月お会いします。</a:t>
             </a:r>
             <a:endParaRPr lang="en-US" sz="1400" dirty="0"/>
           </a:p>
           <a:p>
             <a:pPr indent="0" marL="0">
               <a:lnSpc>
-                <a:spcPts val="2500"/>
+                <a:spcPts val="2600"/>
               </a:lnSpc>
               <a:buNone/>
             </a:pPr>
@@ -10315,14 +10491,14 @@
                 <a:ea typeface="Yu Gothic" pitchFamily="34" charset="-122"/>
                 <a:cs typeface="Yu Gothic" pitchFamily="34" charset="-120"/>
               </a:rPr>
-              <a:t>（オンライン参加もできます）</a:t>
+              <a:t>対面は東京、オンラインも可。</a:t>
             </a:r>
             <a:endParaRPr lang="en-US" sz="1400" dirty="0"/>
           </a:p>
           <a:p>
             <a:pPr indent="0" marL="0">
               <a:lnSpc>
-                <a:spcPts val="2500"/>
+                <a:spcPts val="2600"/>
               </a:lnSpc>
               <a:buNone/>
             </a:pPr>
@@ -10335,27 +10511,7 @@
                 <a:ea typeface="Yu Gothic" pitchFamily="34" charset="-122"/>
                 <a:cs typeface="Yu Gothic" pitchFamily="34" charset="-120"/>
               </a:rPr>
-              <a:t>6ヶ月、オンライン8回。</a:t>
-            </a:r>
-            <a:endParaRPr lang="en-US" sz="1400" dirty="0"/>
-          </a:p>
-          <a:p>
-            <a:pPr indent="0" marL="0">
-              <a:lnSpc>
-                <a:spcPts val="2500"/>
-              </a:lnSpc>
-              <a:buNone/>
-            </a:pPr>
-            <a:r>
-              <a:rPr lang="en-US" sz="1400" dirty="0">
-                <a:solidFill>
-                  <a:srgbClr val="2B2B2B"/>
-                </a:solidFill>
-                <a:latin typeface="Yu Gothic" pitchFamily="34" charset="0"/>
-                <a:ea typeface="Yu Gothic" pitchFamily="34" charset="-122"/>
-                <a:cs typeface="Yu Gothic" pitchFamily="34" charset="-120"/>
-              </a:rPr>
-              <a:t>事前と事後に、個別に見ます。</a:t>
+              <a:t>必要なら、Zoomでもお受けします。</a:t>
             </a:r>
             <a:endParaRPr lang="en-US" sz="1400" dirty="0"/>
           </a:p>
@@ -10369,7 +10525,7 @@
         </p:nvSpPr>
         <p:spPr>
           <a:xfrm>
-            <a:off x="566928" y="4114800"/>
+            <a:off x="566928" y="4206240"/>
             <a:ext cx="8010144" cy="640080"/>
           </a:xfrm>
           <a:prstGeom prst="roundRect">
@@ -10391,7 +10547,7 @@
         </p:nvSpPr>
         <p:spPr>
           <a:xfrm>
-            <a:off x="841248" y="4114800"/>
+            <a:off x="841248" y="4206240"/>
             <a:ext cx="7461504" cy="640080"/>
           </a:xfrm>
           <a:prstGeom prst="rect">
@@ -10416,7 +10572,7 @@
                 <a:ea typeface="Yu Gothic" pitchFamily="34" charset="-122"/>
                 <a:cs typeface="Yu Gothic" pitchFamily="34" charset="-120"/>
               </a:rPr>
-              <a:t>マスター講座は定員10名です。詳しいご案内は、個別相談でお話ししています。</a:t>
+              <a:t>迷われたら、そのままおっしゃってください。合わないほうを、はっきり申し上げます。</a:t>
             </a:r>
             <a:endParaRPr lang="en-US" sz="1400" dirty="0"/>
           </a:p>
@@ -10548,7 +10704,7 @@
                 <a:ea typeface="Yu Gothic" pitchFamily="34" charset="-122"/>
                 <a:cs typeface="Yu Gothic" pitchFamily="34" charset="-120"/>
               </a:rPr>
-              <a:t>AIマーケティング集中講座</a:t>
+              <a:t>AIリール講座</a:t>
             </a:r>
             <a:endParaRPr lang="en-US" sz="1400" dirty="0"/>
           </a:p>
@@ -10587,7 +10743,7 @@
                 <a:ea typeface="Yu Gothic" pitchFamily="34" charset="-122"/>
                 <a:cs typeface="Yu Gothic" pitchFamily="34" charset="-120"/>
               </a:rPr>
-              <a:t>88,000円</a:t>
+              <a:t>220,000円</a:t>
             </a:r>
             <a:endParaRPr lang="en-US" sz="3400" dirty="0"/>
           </a:p>
@@ -10626,7 +10782,7 @@
                 <a:ea typeface="Yu Gothic" pitchFamily="34" charset="-122"/>
                 <a:cs typeface="Yu Gothic" pitchFamily="34" charset="-120"/>
               </a:rPr>
-              <a:t>3ヶ月／定員20名</a:t>
+              <a:t>3ヶ月／定員10名</a:t>
             </a:r>
             <a:endParaRPr lang="en-US" sz="1400" dirty="0"/>
           </a:p>
@@ -10665,7 +10821,7 @@
                 <a:ea typeface="Yu Gothic" pitchFamily="34" charset="-122"/>
                 <a:cs typeface="Yu Gothic" pitchFamily="34" charset="-120"/>
               </a:rPr>
-              <a:t>お支払いは一括です</a:t>
+              <a:t>一括／分割もできます</a:t>
             </a:r>
             <a:endParaRPr lang="en-US" sz="1300" dirty="0"/>
           </a:p>
@@ -10740,27 +10896,24 @@
         </p:nvSpPr>
         <p:spPr>
           <a:xfrm>
-            <a:off x="4937760" y="1847088"/>
-            <a:ext cx="3383280" cy="731520"/>
-          </a:xfrm>
-          <a:prstGeom prst="rect">
-            <a:avLst/>
-          </a:prstGeom>
-          <a:noFill/>
-          <a:ln/>
-        </p:spPr>
-        <p:txBody>
-          <a:bodyPr wrap="square" lIns="0" tIns="0" rIns="0" bIns="0" rtlCol="0" anchor="ctr"/>
-          <a:lstStyle/>
-          <a:p>
-            <a:pPr indent="0" marL="0">
-              <a:lnSpc>
-                <a:spcPts val="3000"/>
-              </a:lnSpc>
-              <a:buNone/>
-            </a:pPr>
-            <a:r>
-              <a:rPr lang="en-US" sz="1900" b="1" dirty="0">
+            <a:off x="4937760" y="1874520"/>
+            <a:ext cx="3383280" cy="640080"/>
+          </a:xfrm>
+          <a:prstGeom prst="rect">
+            <a:avLst/>
+          </a:prstGeom>
+          <a:noFill/>
+          <a:ln/>
+        </p:spPr>
+        <p:txBody>
+          <a:bodyPr wrap="square" lIns="0" tIns="0" rIns="0" bIns="0" rtlCol="0" anchor="ctr"/>
+          <a:lstStyle/>
+          <a:p>
+            <a:pPr indent="0" marL="0">
+              <a:buNone/>
+            </a:pPr>
+            <a:r>
+              <a:rPr lang="en-US" sz="3400" b="1" dirty="0">
                 <a:solidFill>
                   <a:srgbClr val="6D2E46"/>
                 </a:solidFill>
@@ -10768,29 +10921,9 @@
                 <a:ea typeface="Yu Gothic" pitchFamily="34" charset="-122"/>
                 <a:cs typeface="Yu Gothic" pitchFamily="34" charset="-120"/>
               </a:rPr>
-              <a:t>受講料は、個別相談で</a:t>
-            </a:r>
-            <a:endParaRPr lang="en-US" sz="1900" dirty="0"/>
-          </a:p>
-          <a:p>
-            <a:pPr indent="0" marL="0">
-              <a:lnSpc>
-                <a:spcPts val="3000"/>
-              </a:lnSpc>
-              <a:buNone/>
-            </a:pPr>
-            <a:r>
-              <a:rPr lang="en-US" sz="1900" b="1" dirty="0">
-                <a:solidFill>
-                  <a:srgbClr val="6D2E46"/>
-                </a:solidFill>
-                <a:latin typeface="Yu Gothic" pitchFamily="34" charset="0"/>
-                <a:ea typeface="Yu Gothic" pitchFamily="34" charset="-122"/>
-                <a:cs typeface="Yu Gothic" pitchFamily="34" charset="-120"/>
-              </a:rPr>
-              <a:t>お伝えしています</a:t>
-            </a:r>
-            <a:endParaRPr lang="en-US" sz="1900" dirty="0"/>
+              <a:t>660,000円</a:t>
+            </a:r>
+            <a:endParaRPr lang="en-US" sz="3400" dirty="0"/>
           </a:p>
         </p:txBody>
       </p:sp>
@@ -10866,7 +10999,7 @@
                 <a:ea typeface="Yu Gothic" pitchFamily="34" charset="-122"/>
                 <a:cs typeface="Yu Gothic" pitchFamily="34" charset="-120"/>
               </a:rPr>
-              <a:t>分割のお支払いもできます</a:t>
+              <a:t>一括／分割もできます</a:t>
             </a:r>
             <a:endParaRPr lang="en-US" sz="1300" dirty="0"/>
           </a:p>
@@ -10908,7 +11041,7 @@
                 <a:ea typeface="Yu Gothic" pitchFamily="34" charset="-122"/>
                 <a:cs typeface="Yu Gothic" pitchFamily="34" charset="-120"/>
               </a:rPr>
-              <a:t>集中講座の金額は、この場ではっきりお伝えしました。</a:t>
+              <a:t>金額を伏せたままお集めしたくないので、この場で全部お伝えしました。</a:t>
             </a:r>
             <a:endParaRPr lang="en-US" sz="1400" dirty="0"/>
           </a:p>
@@ -10928,7 +11061,7 @@
                 <a:ea typeface="Yu Gothic" pitchFamily="34" charset="-122"/>
                 <a:cs typeface="Yu Gothic" pitchFamily="34" charset="-120"/>
               </a:rPr>
-              <a:t>マスター講座は人数が少ないので、個別にお話ししています。今日お決めいただく必要はありません。</a:t>
+              <a:t>今日お決めいただく必要はありません。</a:t>
             </a:r>
             <a:endParaRPr lang="en-US" sz="1400" dirty="0"/>
           </a:p>
@@ -11299,7 +11432,7 @@
                 <a:ea typeface="Yu Gothic" pitchFamily="34" charset="-122"/>
                 <a:cs typeface="Yu Gothic" pitchFamily="34" charset="-120"/>
               </a:rPr>
-              <a:t>AIマーケティング集中講座 20名／ファッション起業AIマスター講座 10名</a:t>
+              <a:t>どちらも10名</a:t>
             </a:r>
             <a:endParaRPr lang="en-US" sz="1500" dirty="0"/>
           </a:p>
@@ -11507,7 +11640,7 @@
                 <a:ea typeface="Yu Gothic" pitchFamily="34" charset="-122"/>
                 <a:cs typeface="Yu Gothic" pitchFamily="34" charset="-120"/>
               </a:rPr>
-              <a:t>会員サイトがあります。動画の教材も順次増えています</a:t>
+              <a:t>会員サイトがあります。動画講座は見放題です</a:t>
             </a:r>
             <a:endParaRPr lang="en-US" sz="1500" dirty="0"/>
           </a:p>
@@ -11605,7 +11738,7 @@
                 <a:ea typeface="Yu Gothic" pitchFamily="34" charset="-122"/>
                 <a:cs typeface="Yu Gothic" pitchFamily="34" charset="-120"/>
               </a:rPr>
-              <a:t>欠席された回は、アーカイブでご覧いただけます</a:t>
+              <a:t>出られない回は、動画で追っていただけます</a:t>
             </a:r>
             <a:endParaRPr lang="en-US" sz="1500" dirty="0"/>
           </a:p>
@@ -11703,7 +11836,7 @@
                 <a:ea typeface="Yu Gothic" pitchFamily="34" charset="-122"/>
                 <a:cs typeface="Yu Gothic" pitchFamily="34" charset="-120"/>
               </a:rPr>
-              <a:t>ファッション起業AIマスター講座の方は、個別サポートでおぎないます</a:t>
+              <a:t>ご質問は、いつでもチャットでお受けします</a:t>
             </a:r>
             <a:endParaRPr lang="en-US" sz="1500" dirty="0"/>
           </a:p>
@@ -11764,7 +11897,7 @@
                 <a:ea typeface="Yu Gothic" pitchFamily="34" charset="-122"/>
                 <a:cs typeface="Yu Gothic" pitchFamily="34" charset="-120"/>
               </a:rPr>
-              <a:t>6ヶ月のあいだには、どうしても出られない回が出てくると思います。</a:t>
+              <a:t>講座のあいだには、どうしても出られない回が出てくると思います。</a:t>
             </a:r>
             <a:endParaRPr lang="en-US" sz="1500" dirty="0"/>
           </a:p>
@@ -11835,7 +11968,7 @@
                 <a:ea typeface="Yu Gothic" pitchFamily="34" charset="-122"/>
                 <a:cs typeface="Yu Gothic" pitchFamily="34" charset="-120"/>
               </a:rPr>
-              <a:t>今日、お決めいただかなくて大丈夫です</a:t>
+              <a:t>迷われている方へ</a:t>
             </a:r>
             <a:endParaRPr lang="en-US" sz="2700" dirty="0"/>
           </a:p>
@@ -11877,7 +12010,7 @@
                 <a:ea typeface="Yu Gothic" pitchFamily="34" charset="-122"/>
                 <a:cs typeface="Yu Gothic" pitchFamily="34" charset="-120"/>
               </a:rPr>
-              <a:t>迷われている方には、個別相談をご用意しています。</a:t>
+              <a:t>この場でご質問いただければ、そのままお答えします。</a:t>
             </a:r>
             <a:endParaRPr lang="en-US" sz="1600" dirty="0"/>
           </a:p>
@@ -11897,7 +12030,7 @@
                 <a:ea typeface="Yu Gothic" pitchFamily="34" charset="-122"/>
                 <a:cs typeface="Yu Gothic" pitchFamily="34" charset="-120"/>
               </a:rPr>
-              <a:t>1対1で、合うかどうかを一緒に見る時間です。無料です。</a:t>
+              <a:t>個別にお話ししたい方には、1対1の時間もご用意しています。無料です。</a:t>
             </a:r>
             <a:endParaRPr lang="en-US" sz="1600" dirty="0"/>
           </a:p>

--- a/運用/スライド/説明会_20260916.pptx
+++ b/運用/スライド/説明会_20260916.pptx
@@ -10821,7 +10821,7 @@
                 <a:ea typeface="Yu Gothic" pitchFamily="34" charset="-122"/>
                 <a:cs typeface="Yu Gothic" pitchFamily="34" charset="-120"/>
               </a:rPr>
-              <a:t>一括／分割もできます</a:t>
+              <a:t>お支払いは一括です</a:t>
             </a:r>
             <a:endParaRPr lang="en-US" sz="1300" dirty="0"/>
           </a:p>
@@ -10999,7 +10999,7 @@
                 <a:ea typeface="Yu Gothic" pitchFamily="34" charset="-122"/>
                 <a:cs typeface="Yu Gothic" pitchFamily="34" charset="-120"/>
               </a:rPr>
-              <a:t>一括／分割もできます</a:t>
+              <a:t>お支払いは一括です</a:t>
             </a:r>
             <a:endParaRPr lang="en-US" sz="1300" dirty="0"/>
           </a:p>

--- a/運用/スライド/説明会_20260916.pptx
+++ b/運用/スライド/説明会_20260916.pptx
@@ -8569,7 +8569,7 @@
                           <a:ea typeface="Yu Gothic" pitchFamily="34" charset="-122"/>
                           <a:cs typeface="Yu Gothic" pitchFamily="34" charset="-120"/>
                         </a:rPr>
-                        <a:t>AIマスター講座</a:t>
+                        <a:t>アカデミア講座</a:t>
                       </a:r>
                       <a:endParaRPr lang="en-US" sz="1150" dirty="0">
                         <a:latin typeface="Yu Gothic" charset="0"/>
@@ -10037,7 +10037,7 @@
                 <a:ea typeface="Yu Gothic" pitchFamily="34" charset="-122"/>
                 <a:cs typeface="Yu Gothic" pitchFamily="34" charset="-120"/>
               </a:rPr>
-              <a:t>対面ワークショップは10:00-15:00、東京です。マスター講座はオンラインでもご参加いただけます。</a:t>
+              <a:t>対面ワークショップは10:00-15:00、東京です。アカデミア講座はオンラインでもご参加いただけます。</a:t>
             </a:r>
             <a:endParaRPr lang="en-US" sz="1100" dirty="0"/>
           </a:p>
@@ -10429,7 +10429,7 @@
                 <a:ea typeface="Yu Gothic" pitchFamily="34" charset="-122"/>
                 <a:cs typeface="Yu Gothic" pitchFamily="34" charset="-120"/>
               </a:rPr>
-              <a:t>ファッション起業AIマスター講座</a:t>
+              <a:t>ファッション起業アカデミア講座</a:t>
             </a:r>
             <a:endParaRPr lang="en-US" sz="1400" dirty="0"/>
           </a:p>
@@ -10882,7 +10882,7 @@
                 <a:ea typeface="Yu Gothic" pitchFamily="34" charset="-122"/>
                 <a:cs typeface="Yu Gothic" pitchFamily="34" charset="-120"/>
               </a:rPr>
-              <a:t>ファッション起業AIマスター講座</a:t>
+              <a:t>ファッション起業アカデミア講座</a:t>
             </a:r>
             <a:endParaRPr lang="en-US" sz="1400" dirty="0"/>
           </a:p>

--- a/運用/スライド/説明会_20260916.pptx
+++ b/運用/スライド/説明会_20260916.pptx
@@ -10960,7 +10960,7 @@
                 <a:ea typeface="Yu Gothic" pitchFamily="34" charset="-122"/>
                 <a:cs typeface="Yu Gothic" pitchFamily="34" charset="-120"/>
               </a:rPr>
-              <a:t>6ヶ月／定員10名</a:t>
+              <a:t>6ヶ月／定員3名</a:t>
             </a:r>
             <a:endParaRPr lang="en-US" sz="1400" dirty="0"/>
           </a:p>
@@ -11432,7 +11432,7 @@
                 <a:ea typeface="Yu Gothic" pitchFamily="34" charset="-122"/>
                 <a:cs typeface="Yu Gothic" pitchFamily="34" charset="-120"/>
               </a:rPr>
-              <a:t>どちらも10名</a:t>
+              <a:t>AIリール講座 10名／アカデミア講座 3名</a:t>
             </a:r>
             <a:endParaRPr lang="en-US" sz="1500" dirty="0"/>
           </a:p>

--- a/運用/スライド/説明会_20260916.pptx
+++ b/運用/スライド/説明会_20260916.pptx
@@ -5890,7 +5890,7 @@
                 <a:ea typeface="Yu Gothic" pitchFamily="34" charset="-122"/>
                 <a:cs typeface="Yu Gothic" pitchFamily="34" charset="-120"/>
               </a:rPr>
-              <a:t>2026年10月13日（火）開講</a:t>
+              <a:t>発信から、売れる仕組みまで</a:t>
             </a:r>
             <a:endParaRPr lang="en-US" sz="1400" dirty="0"/>
           </a:p>
@@ -5910,7 +5910,7 @@
                 <a:ea typeface="Yu Gothic" pitchFamily="34" charset="-122"/>
                 <a:cs typeface="Yu Gothic" pitchFamily="34" charset="-120"/>
               </a:rPr>
-              <a:t>講座は2つあります</a:t>
+              <a:t>2026年10月13日（火）開講</a:t>
             </a:r>
             <a:endParaRPr lang="en-US" sz="1400" dirty="0"/>
           </a:p>
@@ -5995,12 +5995,12 @@
         </p:nvSpPr>
         <p:spPr>
           <a:xfrm>
-            <a:off x="566928" y="1325880"/>
-            <a:ext cx="8010144" cy="822960"/>
+            <a:off x="566928" y="1188720"/>
+            <a:ext cx="8010144" cy="749808"/>
           </a:xfrm>
           <a:prstGeom prst="roundRect">
             <a:avLst>
-              <a:gd name="adj" fmla="val 8889"/>
+              <a:gd name="adj" fmla="val 9756"/>
             </a:avLst>
           </a:prstGeom>
           <a:solidFill>
@@ -6017,7 +6017,7 @@
         </p:nvSpPr>
         <p:spPr>
           <a:xfrm>
-            <a:off x="795528" y="1527048"/>
+            <a:off x="795528" y="1353312"/>
             <a:ext cx="420624" cy="420624"/>
           </a:xfrm>
           <a:prstGeom prst="ellipse">
@@ -6037,7 +6037,7 @@
         </p:nvSpPr>
         <p:spPr>
           <a:xfrm>
-            <a:off x="795528" y="1527048"/>
+            <a:off x="795528" y="1353312"/>
             <a:ext cx="420624" cy="420624"/>
           </a:xfrm>
           <a:prstGeom prst="rect">
@@ -6076,8 +6076,8 @@
         </p:nvSpPr>
         <p:spPr>
           <a:xfrm>
-            <a:off x="1389888" y="1325880"/>
-            <a:ext cx="3931920" cy="822960"/>
+            <a:off x="1389888" y="1188720"/>
+            <a:ext cx="3931920" cy="749808"/>
           </a:xfrm>
           <a:prstGeom prst="rect">
             <a:avLst/>
@@ -6101,7 +6101,7 @@
                 <a:ea typeface="Yu Gothic" pitchFamily="34" charset="-122"/>
                 <a:cs typeface="Yu Gothic" pitchFamily="34" charset="-120"/>
               </a:rPr>
-              <a:t>AIを中心とした発信の動線設計</a:t>
+              <a:t>ファッション心理学</a:t>
             </a:r>
             <a:endParaRPr lang="en-US" sz="1600" dirty="0"/>
           </a:p>
@@ -6115,8 +6115,8 @@
         </p:nvSpPr>
         <p:spPr>
           <a:xfrm>
-            <a:off x="5367528" y="1325880"/>
-            <a:ext cx="3108960" cy="822960"/>
+            <a:off x="5367528" y="1188720"/>
+            <a:ext cx="3108960" cy="749808"/>
           </a:xfrm>
           <a:prstGeom prst="rect">
             <a:avLst/>
@@ -6140,7 +6140,7 @@
                 <a:ea typeface="Yu Gothic" pitchFamily="34" charset="-122"/>
                 <a:cs typeface="Yu Gothic" pitchFamily="34" charset="-120"/>
               </a:rPr>
-              <a:t>撮る・書く・届けるまで</a:t>
+              <a:t>感性と顧客心理を言葉にする</a:t>
             </a:r>
             <a:endParaRPr lang="en-US" sz="1300" dirty="0"/>
           </a:p>
@@ -6154,12 +6154,12 @@
         </p:nvSpPr>
         <p:spPr>
           <a:xfrm>
-            <a:off x="566928" y="2286000"/>
-            <a:ext cx="8010144" cy="822960"/>
+            <a:off x="566928" y="2048256"/>
+            <a:ext cx="8010144" cy="749808"/>
           </a:xfrm>
           <a:prstGeom prst="roundRect">
             <a:avLst>
-              <a:gd name="adj" fmla="val 8889"/>
+              <a:gd name="adj" fmla="val 9756"/>
             </a:avLst>
           </a:prstGeom>
           <a:solidFill>
@@ -6176,7 +6176,7 @@
         </p:nvSpPr>
         <p:spPr>
           <a:xfrm>
-            <a:off x="795528" y="2487168"/>
+            <a:off x="795528" y="2212848"/>
             <a:ext cx="420624" cy="420624"/>
           </a:xfrm>
           <a:prstGeom prst="ellipse">
@@ -6196,7 +6196,7 @@
         </p:nvSpPr>
         <p:spPr>
           <a:xfrm>
-            <a:off x="795528" y="2487168"/>
+            <a:off x="795528" y="2212848"/>
             <a:ext cx="420624" cy="420624"/>
           </a:xfrm>
           <a:prstGeom prst="rect">
@@ -6235,8 +6235,8 @@
         </p:nvSpPr>
         <p:spPr>
           <a:xfrm>
-            <a:off x="1389888" y="2286000"/>
-            <a:ext cx="3931920" cy="822960"/>
+            <a:off x="1389888" y="2048256"/>
+            <a:ext cx="3931920" cy="749808"/>
           </a:xfrm>
           <a:prstGeom prst="rect">
             <a:avLst/>
@@ -6260,7 +6260,7 @@
                 <a:ea typeface="Yu Gothic" pitchFamily="34" charset="-122"/>
                 <a:cs typeface="Yu Gothic" pitchFamily="34" charset="-120"/>
               </a:rPr>
-              <a:t>ファッション心理学</a:t>
+              <a:t>AIを使った発信</a:t>
             </a:r>
             <a:endParaRPr lang="en-US" sz="1600" dirty="0"/>
           </a:p>
@@ -6274,8 +6274,8 @@
         </p:nvSpPr>
         <p:spPr>
           <a:xfrm>
-            <a:off x="5367528" y="2286000"/>
-            <a:ext cx="3108960" cy="822960"/>
+            <a:off x="5367528" y="2048256"/>
+            <a:ext cx="3108960" cy="749808"/>
           </a:xfrm>
           <a:prstGeom prst="rect">
             <a:avLst/>
@@ -6299,7 +6299,7 @@
                 <a:ea typeface="Yu Gothic" pitchFamily="34" charset="-122"/>
                 <a:cs typeface="Yu Gothic" pitchFamily="34" charset="-120"/>
               </a:rPr>
-              <a:t>感性と顧客心理を言葉にする</a:t>
+              <a:t>撮る・書く・届けるまで</a:t>
             </a:r>
             <a:endParaRPr lang="en-US" sz="1300" dirty="0"/>
           </a:p>
@@ -6313,12 +6313,12 @@
         </p:nvSpPr>
         <p:spPr>
           <a:xfrm>
-            <a:off x="566928" y="3246120"/>
-            <a:ext cx="8010144" cy="822960"/>
+            <a:off x="566928" y="2907792"/>
+            <a:ext cx="8010144" cy="749808"/>
           </a:xfrm>
           <a:prstGeom prst="roundRect">
             <a:avLst>
-              <a:gd name="adj" fmla="val 8889"/>
+              <a:gd name="adj" fmla="val 9756"/>
             </a:avLst>
           </a:prstGeom>
           <a:solidFill>
@@ -6335,7 +6335,7 @@
         </p:nvSpPr>
         <p:spPr>
           <a:xfrm>
-            <a:off x="795528" y="3447288"/>
+            <a:off x="795528" y="3072384"/>
             <a:ext cx="420624" cy="420624"/>
           </a:xfrm>
           <a:prstGeom prst="ellipse">
@@ -6355,7 +6355,7 @@
         </p:nvSpPr>
         <p:spPr>
           <a:xfrm>
-            <a:off x="795528" y="3447288"/>
+            <a:off x="795528" y="3072384"/>
             <a:ext cx="420624" cy="420624"/>
           </a:xfrm>
           <a:prstGeom prst="rect">
@@ -6394,8 +6394,8 @@
         </p:nvSpPr>
         <p:spPr>
           <a:xfrm>
-            <a:off x="1389888" y="3246120"/>
-            <a:ext cx="3931920" cy="822960"/>
+            <a:off x="1389888" y="2907792"/>
+            <a:ext cx="3931920" cy="749808"/>
           </a:xfrm>
           <a:prstGeom prst="rect">
             <a:avLst/>
@@ -6419,7 +6419,7 @@
                 <a:ea typeface="Yu Gothic" pitchFamily="34" charset="-122"/>
                 <a:cs typeface="Yu Gothic" pitchFamily="34" charset="-120"/>
               </a:rPr>
-              <a:t>コーチングの基礎</a:t>
+              <a:t>販売の動線</a:t>
             </a:r>
             <a:endParaRPr lang="en-US" sz="1600" dirty="0"/>
           </a:p>
@@ -6433,8 +6433,8 @@
         </p:nvSpPr>
         <p:spPr>
           <a:xfrm>
-            <a:off x="5367528" y="3246120"/>
-            <a:ext cx="3108960" cy="822960"/>
+            <a:off x="5367528" y="2907792"/>
+            <a:ext cx="3108960" cy="749808"/>
           </a:xfrm>
           <a:prstGeom prst="rect">
             <a:avLst/>
@@ -6458,6 +6458,165 @@
                 <a:ea typeface="Yu Gothic" pitchFamily="34" charset="-122"/>
                 <a:cs typeface="Yu Gothic" pitchFamily="34" charset="-120"/>
               </a:rPr>
+              <a:t>UTAGEなどで申し込み・決済まで</a:t>
+            </a:r>
+            <a:endParaRPr lang="en-US" sz="1300" dirty="0"/>
+          </a:p>
+        </p:txBody>
+      </p:sp>
+      <p:sp>
+        <p:nvSpPr>
+          <p:cNvPr id="18" name="Shape 16"/>
+          <p:cNvSpPr/>
+          <p:nvPr/>
+        </p:nvSpPr>
+        <p:spPr>
+          <a:xfrm>
+            <a:off x="566928" y="3767328"/>
+            <a:ext cx="8010144" cy="749808"/>
+          </a:xfrm>
+          <a:prstGeom prst="roundRect">
+            <a:avLst>
+              <a:gd name="adj" fmla="val 9756"/>
+            </a:avLst>
+          </a:prstGeom>
+          <a:solidFill>
+            <a:srgbClr val="F7F3F1"/>
+          </a:solidFill>
+          <a:ln/>
+        </p:spPr>
+      </p:sp>
+      <p:sp>
+        <p:nvSpPr>
+          <p:cNvPr id="19" name="Shape 17"/>
+          <p:cNvSpPr/>
+          <p:nvPr/>
+        </p:nvSpPr>
+        <p:spPr>
+          <a:xfrm>
+            <a:off x="795528" y="3931920"/>
+            <a:ext cx="420624" cy="420624"/>
+          </a:xfrm>
+          <a:prstGeom prst="ellipse">
+            <a:avLst/>
+          </a:prstGeom>
+          <a:solidFill>
+            <a:srgbClr val="6D2E46"/>
+          </a:solidFill>
+          <a:ln/>
+        </p:spPr>
+      </p:sp>
+      <p:sp>
+        <p:nvSpPr>
+          <p:cNvPr id="20" name="Text 18"/>
+          <p:cNvSpPr txBox="1"/>
+          <p:nvPr/>
+        </p:nvSpPr>
+        <p:spPr>
+          <a:xfrm>
+            <a:off x="795528" y="3931920"/>
+            <a:ext cx="420624" cy="420624"/>
+          </a:xfrm>
+          <a:prstGeom prst="rect">
+            <a:avLst/>
+          </a:prstGeom>
+          <a:noFill/>
+          <a:ln/>
+        </p:spPr>
+        <p:txBody>
+          <a:bodyPr wrap="square" lIns="0" tIns="0" rIns="0" bIns="0" rtlCol="0" anchor="ctr"/>
+          <a:lstStyle/>
+          <a:p>
+            <a:pPr algn="ctr" indent="0" marL="0">
+              <a:buNone/>
+            </a:pPr>
+            <a:r>
+              <a:rPr lang="en-US" sz="1600" b="1" dirty="0">
+                <a:solidFill>
+                  <a:srgbClr val="FFFFFF"/>
+                </a:solidFill>
+                <a:latin typeface="Yu Gothic" pitchFamily="34" charset="0"/>
+                <a:ea typeface="Yu Gothic" pitchFamily="34" charset="-122"/>
+                <a:cs typeface="Yu Gothic" pitchFamily="34" charset="-120"/>
+              </a:rPr>
+              <a:t>4</a:t>
+            </a:r>
+            <a:endParaRPr lang="en-US" sz="1600" dirty="0"/>
+          </a:p>
+        </p:txBody>
+      </p:sp>
+      <p:sp>
+        <p:nvSpPr>
+          <p:cNvPr id="21" name="Text 19"/>
+          <p:cNvSpPr txBox="1"/>
+          <p:nvPr/>
+        </p:nvSpPr>
+        <p:spPr>
+          <a:xfrm>
+            <a:off x="1389888" y="3767328"/>
+            <a:ext cx="3931920" cy="749808"/>
+          </a:xfrm>
+          <a:prstGeom prst="rect">
+            <a:avLst/>
+          </a:prstGeom>
+          <a:noFill/>
+          <a:ln/>
+        </p:spPr>
+        <p:txBody>
+          <a:bodyPr wrap="square" lIns="0" tIns="0" rIns="0" bIns="0" rtlCol="0" anchor="ctr"/>
+          <a:lstStyle/>
+          <a:p>
+            <a:pPr indent="0" marL="0">
+              <a:buNone/>
+            </a:pPr>
+            <a:r>
+              <a:rPr lang="en-US" sz="1600" b="1" dirty="0">
+                <a:solidFill>
+                  <a:srgbClr val="6D2E46"/>
+                </a:solidFill>
+                <a:latin typeface="Yu Gothic" pitchFamily="34" charset="0"/>
+                <a:ea typeface="Yu Gothic" pitchFamily="34" charset="-122"/>
+                <a:cs typeface="Yu Gothic" pitchFamily="34" charset="-120"/>
+              </a:rPr>
+              <a:t>コーチング</a:t>
+            </a:r>
+            <a:endParaRPr lang="en-US" sz="1600" dirty="0"/>
+          </a:p>
+        </p:txBody>
+      </p:sp>
+      <p:sp>
+        <p:nvSpPr>
+          <p:cNvPr id="22" name="Text 20"/>
+          <p:cNvSpPr txBox="1"/>
+          <p:nvPr/>
+        </p:nvSpPr>
+        <p:spPr>
+          <a:xfrm>
+            <a:off x="5367528" y="3767328"/>
+            <a:ext cx="3108960" cy="749808"/>
+          </a:xfrm>
+          <a:prstGeom prst="rect">
+            <a:avLst/>
+          </a:prstGeom>
+          <a:noFill/>
+          <a:ln/>
+        </p:spPr>
+        <p:txBody>
+          <a:bodyPr wrap="square" lIns="0" tIns="0" rIns="0" bIns="0" rtlCol="0" anchor="ctr"/>
+          <a:lstStyle/>
+          <a:p>
+            <a:pPr indent="0" marL="0">
+              <a:buNone/>
+            </a:pPr>
+            <a:r>
+              <a:rPr lang="en-US" sz="1300" dirty="0">
+                <a:solidFill>
+                  <a:srgbClr val="2B2B2B"/>
+                </a:solidFill>
+                <a:latin typeface="Yu Gothic" pitchFamily="34" charset="0"/>
+                <a:ea typeface="Yu Gothic" pitchFamily="34" charset="-122"/>
+                <a:cs typeface="Yu Gothic" pitchFamily="34" charset="-120"/>
+              </a:rPr>
               <a:t>押しつけずに、続く形にする</a:t>
             </a:r>
             <a:endParaRPr lang="en-US" sz="1300" dirty="0"/>
@@ -6466,14 +6625,14 @@
       </p:sp>
       <p:sp>
         <p:nvSpPr>
-          <p:cNvPr id="18" name="Text 16"/>
-          <p:cNvSpPr txBox="1"/>
-          <p:nvPr/>
-        </p:nvSpPr>
-        <p:spPr>
-          <a:xfrm>
-            <a:off x="566928" y="4315968"/>
-            <a:ext cx="8010144" cy="365760"/>
+          <p:cNvPr id="23" name="Text 21"/>
+          <p:cNvSpPr txBox="1"/>
+          <p:nvPr/>
+        </p:nvSpPr>
+        <p:spPr>
+          <a:xfrm>
+            <a:off x="566928" y="4645152"/>
+            <a:ext cx="8010144" cy="347472"/>
           </a:xfrm>
           <a:prstGeom prst="rect">
             <a:avLst/>
@@ -6497,7 +6656,7 @@
                 <a:ea typeface="Yu Gothic" pitchFamily="34" charset="-122"/>
                 <a:cs typeface="Yu Gothic" pitchFamily="34" charset="-120"/>
               </a:rPr>
-              <a:t>AIは、ゼロから作る道具ではありません。自分の中にあるものを展開する共同制作者です。</a:t>
+              <a:t>三の「販売の動線」は、ファッション起業アカデミア講座で扱います。</a:t>
             </a:r>
             <a:endParaRPr lang="en-US" sz="1400" dirty="0"/>
           </a:p>
@@ -7323,7 +7482,27 @@
                 <a:ea typeface="Yu Gothic" pitchFamily="34" charset="-122"/>
                 <a:cs typeface="Yu Gothic" pitchFamily="34" charset="-120"/>
               </a:rPr>
-              <a:t>お申し込み</a:t>
+              <a:t>申し込み</a:t>
+            </a:r>
+            <a:endParaRPr lang="en-US" sz="1300" dirty="0"/>
+          </a:p>
+          <a:p>
+            <a:pPr algn="ctr" indent="0" marL="0">
+              <a:lnSpc>
+                <a:spcPts val="1800"/>
+              </a:lnSpc>
+              <a:buNone/>
+            </a:pPr>
+            <a:r>
+              <a:rPr lang="en-US" sz="1300" b="1" dirty="0">
+                <a:solidFill>
+                  <a:srgbClr val="6D2E46"/>
+                </a:solidFill>
+                <a:latin typeface="Yu Gothic" pitchFamily="34" charset="0"/>
+                <a:ea typeface="Yu Gothic" pitchFamily="34" charset="-122"/>
+                <a:cs typeface="Yu Gothic" pitchFamily="34" charset="-120"/>
+              </a:rPr>
+              <a:t>決済</a:t>
             </a:r>
             <a:endParaRPr lang="en-US" sz="1300" dirty="0"/>
           </a:p>
@@ -7387,7 +7566,7 @@
                 <a:ea typeface="Yu Gothic" pitchFamily="34" charset="-122"/>
                 <a:cs typeface="Yu Gothic" pitchFamily="34" charset="-120"/>
               </a:rPr>
-              <a:t>ここまでを、ひとつながりで組み立てます。</a:t>
+              <a:t>ここまでを、UTAGEなどを使ってひとつながりにします。</a:t>
             </a:r>
             <a:endParaRPr lang="en-US" sz="1500" dirty="0"/>
           </a:p>
@@ -7407,7 +7586,7 @@
                 <a:ea typeface="Yu Gothic" pitchFamily="34" charset="-122"/>
                 <a:cs typeface="Yu Gothic" pitchFamily="34" charset="-120"/>
               </a:rPr>
-              <a:t>1つでも欠けると、投稿は伸びても、仕事にはつながりません。</a:t>
+              <a:t>最後の決済まで作って、はじめて収益になります。</a:t>
             </a:r>
             <a:endParaRPr lang="en-US" sz="1500" dirty="0"/>
           </a:p>
@@ -8770,6 +8949,203 @@
                           <a:cs typeface="Yu Gothic" pitchFamily="34" charset="-120"/>
                         </a:rPr>
                         <a:t>6ヶ月</a:t>
+                      </a:r>
+                      <a:endParaRPr lang="en-US" sz="1150" dirty="0">
+                        <a:latin typeface="Yu Gothic" charset="0"/>
+                        <a:ea typeface="Yu Gothic" charset="0"/>
+                        <a:cs typeface="Yu Gothic" charset="0"/>
+                      </a:endParaRPr>
+                    </a:p>
+                  </a:txBody>
+                  <a:tcPr marL="63500" marR="63500" marT="63500" marB="63500" anchor="ctr">
+                    <a:lnL w="6350" cap="flat" cmpd="sng" algn="ctr">
+                      <a:solidFill>
+                        <a:srgbClr val="DDD5D2"/>
+                      </a:solidFill>
+                      <a:prstDash val="solid"/>
+                      <a:round/>
+                      <a:headEnd type="none" w="med" len="med"/>
+                      <a:tailEnd type="none" w="med" len="med"/>
+                    </a:lnL>
+                    <a:lnR w="6350" cap="flat" cmpd="sng" algn="ctr">
+                      <a:solidFill>
+                        <a:srgbClr val="DDD5D2"/>
+                      </a:solidFill>
+                      <a:prstDash val="solid"/>
+                      <a:round/>
+                      <a:headEnd type="none" w="med" len="med"/>
+                      <a:tailEnd type="none" w="med" len="med"/>
+                    </a:lnR>
+                    <a:lnT w="6350" cap="flat" cmpd="sng" algn="ctr">
+                      <a:solidFill>
+                        <a:srgbClr val="DDD5D2"/>
+                      </a:solidFill>
+                      <a:prstDash val="solid"/>
+                      <a:round/>
+                      <a:headEnd type="none" w="med" len="med"/>
+                      <a:tailEnd type="none" w="med" len="med"/>
+                    </a:lnT>
+                    <a:lnB w="6350" cap="flat" cmpd="sng" algn="ctr">
+                      <a:solidFill>
+                        <a:srgbClr val="DDD5D2"/>
+                      </a:solidFill>
+                      <a:prstDash val="solid"/>
+                      <a:round/>
+                      <a:headEnd type="none" w="med" len="med"/>
+                      <a:tailEnd type="none" w="med" len="med"/>
+                    </a:lnB>
+                  </a:tcPr>
+                </a:tc>
+              </a:tr>
+              <a:tr h="347472">
+                <a:tc>
+                  <a:txBody>
+                    <a:bodyPr/>
+                    <a:lstStyle/>
+                    <a:p>
+                      <a:pPr indent="0" marL="0">
+                        <a:buNone/>
+                      </a:pPr>
+                      <a:r>
+                        <a:rPr lang="en-US" sz="1150" dirty="0">
+                          <a:solidFill>
+                            <a:srgbClr val="2B2B2B"/>
+                          </a:solidFill>
+                          <a:latin typeface="Yu Gothic" pitchFamily="34" charset="0"/>
+                          <a:ea typeface="Yu Gothic" pitchFamily="34" charset="-122"/>
+                          <a:cs typeface="Yu Gothic" pitchFamily="34" charset="-120"/>
+                        </a:rPr>
+                        <a:t>販売の動線づくり</a:t>
+                      </a:r>
+                      <a:endParaRPr lang="en-US" sz="1150" dirty="0">
+                        <a:latin typeface="Yu Gothic" charset="0"/>
+                        <a:ea typeface="Yu Gothic" charset="0"/>
+                        <a:cs typeface="Yu Gothic" charset="0"/>
+                      </a:endParaRPr>
+                    </a:p>
+                  </a:txBody>
+                  <a:tcPr marL="63500" marR="63500" marT="63500" marB="63500" anchor="ctr">
+                    <a:lnL w="6350" cap="flat" cmpd="sng" algn="ctr">
+                      <a:solidFill>
+                        <a:srgbClr val="DDD5D2"/>
+                      </a:solidFill>
+                      <a:prstDash val="solid"/>
+                      <a:round/>
+                      <a:headEnd type="none" w="med" len="med"/>
+                      <a:tailEnd type="none" w="med" len="med"/>
+                    </a:lnL>
+                    <a:lnR w="6350" cap="flat" cmpd="sng" algn="ctr">
+                      <a:solidFill>
+                        <a:srgbClr val="DDD5D2"/>
+                      </a:solidFill>
+                      <a:prstDash val="solid"/>
+                      <a:round/>
+                      <a:headEnd type="none" w="med" len="med"/>
+                      <a:tailEnd type="none" w="med" len="med"/>
+                    </a:lnR>
+                    <a:lnT w="6350" cap="flat" cmpd="sng" algn="ctr">
+                      <a:solidFill>
+                        <a:srgbClr val="DDD5D2"/>
+                      </a:solidFill>
+                      <a:prstDash val="solid"/>
+                      <a:round/>
+                      <a:headEnd type="none" w="med" len="med"/>
+                      <a:tailEnd type="none" w="med" len="med"/>
+                    </a:lnT>
+                    <a:lnB w="6350" cap="flat" cmpd="sng" algn="ctr">
+                      <a:solidFill>
+                        <a:srgbClr val="DDD5D2"/>
+                      </a:solidFill>
+                      <a:prstDash val="solid"/>
+                      <a:round/>
+                      <a:headEnd type="none" w="med" len="med"/>
+                      <a:tailEnd type="none" w="med" len="med"/>
+                    </a:lnB>
+                  </a:tcPr>
+                </a:tc>
+                <a:tc>
+                  <a:txBody>
+                    <a:bodyPr/>
+                    <a:lstStyle/>
+                    <a:p>
+                      <a:pPr indent="0" marL="0">
+                        <a:buNone/>
+                      </a:pPr>
+                      <a:r>
+                        <a:rPr lang="en-US" sz="1150" dirty="0">
+                          <a:solidFill>
+                            <a:srgbClr val="2B2B2B"/>
+                          </a:solidFill>
+                          <a:latin typeface="Yu Gothic" pitchFamily="34" charset="0"/>
+                          <a:ea typeface="Yu Gothic" pitchFamily="34" charset="-122"/>
+                          <a:cs typeface="Yu Gothic" pitchFamily="34" charset="-120"/>
+                        </a:rPr>
+                        <a:t>—</a:t>
+                      </a:r>
+                      <a:endParaRPr lang="en-US" sz="1150" dirty="0">
+                        <a:latin typeface="Yu Gothic" charset="0"/>
+                        <a:ea typeface="Yu Gothic" charset="0"/>
+                        <a:cs typeface="Yu Gothic" charset="0"/>
+                      </a:endParaRPr>
+                    </a:p>
+                  </a:txBody>
+                  <a:tcPr marL="63500" marR="63500" marT="63500" marB="63500" anchor="ctr">
+                    <a:lnL w="6350" cap="flat" cmpd="sng" algn="ctr">
+                      <a:solidFill>
+                        <a:srgbClr val="DDD5D2"/>
+                      </a:solidFill>
+                      <a:prstDash val="solid"/>
+                      <a:round/>
+                      <a:headEnd type="none" w="med" len="med"/>
+                      <a:tailEnd type="none" w="med" len="med"/>
+                    </a:lnL>
+                    <a:lnR w="6350" cap="flat" cmpd="sng" algn="ctr">
+                      <a:solidFill>
+                        <a:srgbClr val="DDD5D2"/>
+                      </a:solidFill>
+                      <a:prstDash val="solid"/>
+                      <a:round/>
+                      <a:headEnd type="none" w="med" len="med"/>
+                      <a:tailEnd type="none" w="med" len="med"/>
+                    </a:lnR>
+                    <a:lnT w="6350" cap="flat" cmpd="sng" algn="ctr">
+                      <a:solidFill>
+                        <a:srgbClr val="DDD5D2"/>
+                      </a:solidFill>
+                      <a:prstDash val="solid"/>
+                      <a:round/>
+                      <a:headEnd type="none" w="med" len="med"/>
+                      <a:tailEnd type="none" w="med" len="med"/>
+                    </a:lnT>
+                    <a:lnB w="6350" cap="flat" cmpd="sng" algn="ctr">
+                      <a:solidFill>
+                        <a:srgbClr val="DDD5D2"/>
+                      </a:solidFill>
+                      <a:prstDash val="solid"/>
+                      <a:round/>
+                      <a:headEnd type="none" w="med" len="med"/>
+                      <a:tailEnd type="none" w="med" len="med"/>
+                    </a:lnB>
+                  </a:tcPr>
+                </a:tc>
+                <a:tc>
+                  <a:txBody>
+                    <a:bodyPr/>
+                    <a:lstStyle/>
+                    <a:p>
+                      <a:pPr indent="0" marL="0">
+                        <a:buNone/>
+                      </a:pPr>
+                      <a:r>
+                        <a:rPr lang="en-US" sz="1150" dirty="0">
+                          <a:solidFill>
+                            <a:srgbClr val="2B2B2B"/>
+                          </a:solidFill>
+                          <a:latin typeface="Yu Gothic" pitchFamily="34" charset="0"/>
+                          <a:ea typeface="Yu Gothic" pitchFamily="34" charset="-122"/>
+                          <a:cs typeface="Yu Gothic" pitchFamily="34" charset="-120"/>
+                        </a:rPr>
+                        <a:t>UTAGEなどで申し込み・決済まで</a:t>
                       </a:r>
                       <a:endParaRPr lang="en-US" sz="1150" dirty="0">
                         <a:latin typeface="Yu Gothic" charset="0"/>
@@ -9624,203 +10000,6 @@
                           <a:ea typeface="Yu Gothic" pitchFamily="34" charset="-122"/>
                           <a:cs typeface="Yu Gothic" pitchFamily="34" charset="-120"/>
                         </a:rPr>
-                        <a:t>動画講座</a:t>
-                      </a:r>
-                      <a:endParaRPr lang="en-US" sz="1150" dirty="0">
-                        <a:latin typeface="Yu Gothic" charset="0"/>
-                        <a:ea typeface="Yu Gothic" charset="0"/>
-                        <a:cs typeface="Yu Gothic" charset="0"/>
-                      </a:endParaRPr>
-                    </a:p>
-                  </a:txBody>
-                  <a:tcPr marL="63500" marR="63500" marT="63500" marB="63500" anchor="ctr">
-                    <a:lnL w="6350" cap="flat" cmpd="sng" algn="ctr">
-                      <a:solidFill>
-                        <a:srgbClr val="DDD5D2"/>
-                      </a:solidFill>
-                      <a:prstDash val="solid"/>
-                      <a:round/>
-                      <a:headEnd type="none" w="med" len="med"/>
-                      <a:tailEnd type="none" w="med" len="med"/>
-                    </a:lnL>
-                    <a:lnR w="6350" cap="flat" cmpd="sng" algn="ctr">
-                      <a:solidFill>
-                        <a:srgbClr val="DDD5D2"/>
-                      </a:solidFill>
-                      <a:prstDash val="solid"/>
-                      <a:round/>
-                      <a:headEnd type="none" w="med" len="med"/>
-                      <a:tailEnd type="none" w="med" len="med"/>
-                    </a:lnR>
-                    <a:lnT w="6350" cap="flat" cmpd="sng" algn="ctr">
-                      <a:solidFill>
-                        <a:srgbClr val="DDD5D2"/>
-                      </a:solidFill>
-                      <a:prstDash val="solid"/>
-                      <a:round/>
-                      <a:headEnd type="none" w="med" len="med"/>
-                      <a:tailEnd type="none" w="med" len="med"/>
-                    </a:lnT>
-                    <a:lnB w="6350" cap="flat" cmpd="sng" algn="ctr">
-                      <a:solidFill>
-                        <a:srgbClr val="DDD5D2"/>
-                      </a:solidFill>
-                      <a:prstDash val="solid"/>
-                      <a:round/>
-                      <a:headEnd type="none" w="med" len="med"/>
-                      <a:tailEnd type="none" w="med" len="med"/>
-                    </a:lnB>
-                  </a:tcPr>
-                </a:tc>
-                <a:tc>
-                  <a:txBody>
-                    <a:bodyPr/>
-                    <a:lstStyle/>
-                    <a:p>
-                      <a:pPr indent="0" marL="0">
-                        <a:buNone/>
-                      </a:pPr>
-                      <a:r>
-                        <a:rPr lang="en-US" sz="1150" dirty="0">
-                          <a:solidFill>
-                            <a:srgbClr val="2B2B2B"/>
-                          </a:solidFill>
-                          <a:latin typeface="Yu Gothic" pitchFamily="34" charset="0"/>
-                          <a:ea typeface="Yu Gothic" pitchFamily="34" charset="-122"/>
-                          <a:cs typeface="Yu Gothic" pitchFamily="34" charset="-120"/>
-                        </a:rPr>
-                        <a:t>見放題</a:t>
-                      </a:r>
-                      <a:endParaRPr lang="en-US" sz="1150" dirty="0">
-                        <a:latin typeface="Yu Gothic" charset="0"/>
-                        <a:ea typeface="Yu Gothic" charset="0"/>
-                        <a:cs typeface="Yu Gothic" charset="0"/>
-                      </a:endParaRPr>
-                    </a:p>
-                  </a:txBody>
-                  <a:tcPr marL="63500" marR="63500" marT="63500" marB="63500" anchor="ctr">
-                    <a:lnL w="6350" cap="flat" cmpd="sng" algn="ctr">
-                      <a:solidFill>
-                        <a:srgbClr val="DDD5D2"/>
-                      </a:solidFill>
-                      <a:prstDash val="solid"/>
-                      <a:round/>
-                      <a:headEnd type="none" w="med" len="med"/>
-                      <a:tailEnd type="none" w="med" len="med"/>
-                    </a:lnL>
-                    <a:lnR w="6350" cap="flat" cmpd="sng" algn="ctr">
-                      <a:solidFill>
-                        <a:srgbClr val="DDD5D2"/>
-                      </a:solidFill>
-                      <a:prstDash val="solid"/>
-                      <a:round/>
-                      <a:headEnd type="none" w="med" len="med"/>
-                      <a:tailEnd type="none" w="med" len="med"/>
-                    </a:lnR>
-                    <a:lnT w="6350" cap="flat" cmpd="sng" algn="ctr">
-                      <a:solidFill>
-                        <a:srgbClr val="DDD5D2"/>
-                      </a:solidFill>
-                      <a:prstDash val="solid"/>
-                      <a:round/>
-                      <a:headEnd type="none" w="med" len="med"/>
-                      <a:tailEnd type="none" w="med" len="med"/>
-                    </a:lnT>
-                    <a:lnB w="6350" cap="flat" cmpd="sng" algn="ctr">
-                      <a:solidFill>
-                        <a:srgbClr val="DDD5D2"/>
-                      </a:solidFill>
-                      <a:prstDash val="solid"/>
-                      <a:round/>
-                      <a:headEnd type="none" w="med" len="med"/>
-                      <a:tailEnd type="none" w="med" len="med"/>
-                    </a:lnB>
-                  </a:tcPr>
-                </a:tc>
-                <a:tc>
-                  <a:txBody>
-                    <a:bodyPr/>
-                    <a:lstStyle/>
-                    <a:p>
-                      <a:pPr indent="0" marL="0">
-                        <a:buNone/>
-                      </a:pPr>
-                      <a:r>
-                        <a:rPr lang="en-US" sz="1150" dirty="0">
-                          <a:solidFill>
-                            <a:srgbClr val="2B2B2B"/>
-                          </a:solidFill>
-                          <a:latin typeface="Yu Gothic" pitchFamily="34" charset="0"/>
-                          <a:ea typeface="Yu Gothic" pitchFamily="34" charset="-122"/>
-                          <a:cs typeface="Yu Gothic" pitchFamily="34" charset="-120"/>
-                        </a:rPr>
-                        <a:t>見放題</a:t>
-                      </a:r>
-                      <a:endParaRPr lang="en-US" sz="1150" dirty="0">
-                        <a:latin typeface="Yu Gothic" charset="0"/>
-                        <a:ea typeface="Yu Gothic" charset="0"/>
-                        <a:cs typeface="Yu Gothic" charset="0"/>
-                      </a:endParaRPr>
-                    </a:p>
-                  </a:txBody>
-                  <a:tcPr marL="63500" marR="63500" marT="63500" marB="63500" anchor="ctr">
-                    <a:lnL w="6350" cap="flat" cmpd="sng" algn="ctr">
-                      <a:solidFill>
-                        <a:srgbClr val="DDD5D2"/>
-                      </a:solidFill>
-                      <a:prstDash val="solid"/>
-                      <a:round/>
-                      <a:headEnd type="none" w="med" len="med"/>
-                      <a:tailEnd type="none" w="med" len="med"/>
-                    </a:lnL>
-                    <a:lnR w="6350" cap="flat" cmpd="sng" algn="ctr">
-                      <a:solidFill>
-                        <a:srgbClr val="DDD5D2"/>
-                      </a:solidFill>
-                      <a:prstDash val="solid"/>
-                      <a:round/>
-                      <a:headEnd type="none" w="med" len="med"/>
-                      <a:tailEnd type="none" w="med" len="med"/>
-                    </a:lnR>
-                    <a:lnT w="6350" cap="flat" cmpd="sng" algn="ctr">
-                      <a:solidFill>
-                        <a:srgbClr val="DDD5D2"/>
-                      </a:solidFill>
-                      <a:prstDash val="solid"/>
-                      <a:round/>
-                      <a:headEnd type="none" w="med" len="med"/>
-                      <a:tailEnd type="none" w="med" len="med"/>
-                    </a:lnT>
-                    <a:lnB w="6350" cap="flat" cmpd="sng" algn="ctr">
-                      <a:solidFill>
-                        <a:srgbClr val="DDD5D2"/>
-                      </a:solidFill>
-                      <a:prstDash val="solid"/>
-                      <a:round/>
-                      <a:headEnd type="none" w="med" len="med"/>
-                      <a:tailEnd type="none" w="med" len="med"/>
-                    </a:lnB>
-                  </a:tcPr>
-                </a:tc>
-              </a:tr>
-              <a:tr h="347472">
-                <a:tc>
-                  <a:txBody>
-                    <a:bodyPr/>
-                    <a:lstStyle/>
-                    <a:p>
-                      <a:pPr indent="0" marL="0">
-                        <a:buNone/>
-                      </a:pPr>
-                      <a:r>
-                        <a:rPr lang="en-US" sz="1150" dirty="0">
-                          <a:solidFill>
-                            <a:srgbClr val="2B2B2B"/>
-                          </a:solidFill>
-                          <a:latin typeface="Yu Gothic" pitchFamily="34" charset="0"/>
-                          <a:ea typeface="Yu Gothic" pitchFamily="34" charset="-122"/>
-                          <a:cs typeface="Yu Gothic" pitchFamily="34" charset="-120"/>
-                        </a:rPr>
                         <a:t>質問し放題</a:t>
                       </a:r>
                       <a:endParaRPr lang="en-US" sz="1150" dirty="0">
@@ -10037,7 +10216,7 @@
                 <a:ea typeface="Yu Gothic" pitchFamily="34" charset="-122"/>
                 <a:cs typeface="Yu Gothic" pitchFamily="34" charset="-120"/>
               </a:rPr>
-              <a:t>対面ワークショップは10:00-15:00、東京です。アカデミア講座はオンラインでもご参加いただけます。</a:t>
+              <a:t>動画講座はどちらも見放題。対面ワークショップは10:00-15:00、東京。アカデミア講座はオンラインでも可。</a:t>
             </a:r>
             <a:endParaRPr lang="en-US" sz="1100" dirty="0"/>
           </a:p>
@@ -10076,7 +10255,7 @@
                 <a:ea typeface="Yu Gothic" pitchFamily="34" charset="-122"/>
                 <a:cs typeface="Yu Gothic" pitchFamily="34" charset="-120"/>
               </a:rPr>
-              <a:t>どちらが上ということではありません。関わり方が違います。</a:t>
+              <a:t>違うのは、どこまで作るかです。</a:t>
             </a:r>
             <a:endParaRPr lang="en-US" sz="1400" dirty="0"/>
           </a:p>
@@ -10208,7 +10387,7 @@
                 <a:ea typeface="Yu Gothic" pitchFamily="34" charset="-122"/>
                 <a:cs typeface="Yu Gothic" pitchFamily="34" charset="-120"/>
               </a:rPr>
-              <a:t>まず、リールから始めたい方</a:t>
+              <a:t>届くところまで、作りたい方</a:t>
             </a:r>
             <a:endParaRPr lang="en-US" sz="1600" dirty="0"/>
           </a:p>
@@ -10289,7 +10468,7 @@
                 <a:ea typeface="Yu Gothic" pitchFamily="34" charset="-122"/>
                 <a:cs typeface="Yu Gothic" pitchFamily="34" charset="-120"/>
               </a:rPr>
-              <a:t>3ヶ月。オンライン3回と、</a:t>
+              <a:t>3ヶ月。リールを作れるように。</a:t>
             </a:r>
             <a:endParaRPr lang="en-US" sz="1400" dirty="0"/>
           </a:p>
@@ -10309,7 +10488,7 @@
                 <a:ea typeface="Yu Gothic" pitchFamily="34" charset="-122"/>
                 <a:cs typeface="Yu Gothic" pitchFamily="34" charset="-120"/>
               </a:rPr>
-              <a:t>対面ワークショップが1回。</a:t>
+              <a:t>オンライン3回と対面1回。</a:t>
             </a:r>
             <a:endParaRPr lang="en-US" sz="1400" dirty="0"/>
           </a:p>
@@ -10390,7 +10569,7 @@
                 <a:ea typeface="Yu Gothic" pitchFamily="34" charset="-122"/>
                 <a:cs typeface="Yu Gothic" pitchFamily="34" charset="-120"/>
               </a:rPr>
-              <a:t>仕事の形まで作りたい方</a:t>
+              <a:t>売れるところまで、作りたい方</a:t>
             </a:r>
             <a:endParaRPr lang="en-US" sz="1600" dirty="0"/>
           </a:p>
@@ -10471,7 +10650,7 @@
                 <a:ea typeface="Yu Gothic" pitchFamily="34" charset="-122"/>
                 <a:cs typeface="Yu Gothic" pitchFamily="34" charset="-120"/>
               </a:rPr>
-              <a:t>6ヶ月。毎月お会いします。</a:t>
+              <a:t>6ヶ月。UTAGEなどを使って、</a:t>
             </a:r>
             <a:endParaRPr lang="en-US" sz="1400" dirty="0"/>
           </a:p>
@@ -10491,7 +10670,7 @@
                 <a:ea typeface="Yu Gothic" pitchFamily="34" charset="-122"/>
                 <a:cs typeface="Yu Gothic" pitchFamily="34" charset="-120"/>
               </a:rPr>
-              <a:t>対面は東京、オンラインも可。</a:t>
+              <a:t>申し込みと決済まで作ります。</a:t>
             </a:r>
             <a:endParaRPr lang="en-US" sz="1400" dirty="0"/>
           </a:p>
